--- a/test/c_es_dn.pptx
+++ b/test/c_es_dn.pptx
@@ -5,7 +5,7 @@
     <p:sldMasterId id="2147483648" r:id="rId1"/>
   </p:sldMasterIdLst>
   <p:sldIdLst>
-    <p:sldId id="256" r:id="rId7"/>
+    <p:sldId id="256" r:id="rId2"/>
   </p:sldIdLst>
   <p:sldSz cx="9144000" cy="6858000" type="screen4x3"/>
   <p:notesSz cx="6858000" cy="9144000"/>
@@ -104,7 +104,84 @@
       </a:defRPr>
     </a:lvl9pPr>
   </p:defaultTextStyle>
+  <p:extLst>
+    <p:ext uri="{EFAFB233-063F-42B5-8137-9DF3F51BA10A}">
+      <p15:sldGuideLst xmlns:p15="http://schemas.microsoft.com/office/powerpoint/2012/main">
+        <p15:guide id="1" orient="horz" pos="2160">
+          <p15:clr>
+            <a:srgbClr val="A4A3A4"/>
+          </p15:clr>
+        </p15:guide>
+        <p15:guide id="2" pos="2880">
+          <p15:clr>
+            <a:srgbClr val="A4A3A4"/>
+          </p15:clr>
+        </p15:guide>
+      </p15:sldGuideLst>
+    </p:ext>
+  </p:extLst>
 </p:presentation>
+</file>
+
+<file path=ppt/changesInfos/changesInfo1.xml><?xml version="1.0" encoding="utf-8"?>
+<pc:chgInfo xmlns:a="http://schemas.openxmlformats.org/drawingml/2006/main" xmlns:r="http://schemas.openxmlformats.org/officeDocument/2006/relationships" xmlns:ac="http://schemas.microsoft.com/office/drawing/2013/main/command" xmlns:pc="http://schemas.microsoft.com/office/powerpoint/2013/main/command">
+  <pc:docChgLst>
+    <pc:chgData name="Uisang.Hwang" userId="ff31788d-e7f8-473d-8559-e09edcce660a" providerId="ADAL" clId="{4782C3F0-101A-4321-9814-D3528C60F802}"/>
+    <pc:docChg chg="undo custSel modSld">
+      <pc:chgData name="Uisang.Hwang" userId="ff31788d-e7f8-473d-8559-e09edcce660a" providerId="ADAL" clId="{4782C3F0-101A-4321-9814-D3528C60F802}" dt="2026-04-11T20:45:08.540" v="5" actId="1076"/>
+      <pc:docMkLst>
+        <pc:docMk/>
+      </pc:docMkLst>
+      <pc:sldChg chg="modSp mod">
+        <pc:chgData name="Uisang.Hwang" userId="ff31788d-e7f8-473d-8559-e09edcce660a" providerId="ADAL" clId="{4782C3F0-101A-4321-9814-D3528C60F802}" dt="2026-04-11T20:45:08.540" v="5" actId="1076"/>
+        <pc:sldMkLst>
+          <pc:docMk/>
+          <pc:sldMk cId="0" sldId="256"/>
+        </pc:sldMkLst>
+        <pc:spChg chg="mod">
+          <ac:chgData name="Uisang.Hwang" userId="ff31788d-e7f8-473d-8559-e09edcce660a" providerId="ADAL" clId="{4782C3F0-101A-4321-9814-D3528C60F802}" dt="2026-04-11T20:44:47.011" v="2" actId="1076"/>
+          <ac:spMkLst>
+            <pc:docMk/>
+            <pc:sldMk cId="0" sldId="256"/>
+            <ac:spMk id="2" creationId="{00000000-0000-0000-0000-000000000000}"/>
+          </ac:spMkLst>
+        </pc:spChg>
+        <pc:spChg chg="mod">
+          <ac:chgData name="Uisang.Hwang" userId="ff31788d-e7f8-473d-8559-e09edcce660a" providerId="ADAL" clId="{4782C3F0-101A-4321-9814-D3528C60F802}" dt="2026-04-11T20:44:47.011" v="2" actId="1076"/>
+          <ac:spMkLst>
+            <pc:docMk/>
+            <pc:sldMk cId="0" sldId="256"/>
+            <ac:spMk id="3" creationId="{00000000-0000-0000-0000-000000000000}"/>
+          </ac:spMkLst>
+        </pc:spChg>
+        <pc:spChg chg="mod">
+          <ac:chgData name="Uisang.Hwang" userId="ff31788d-e7f8-473d-8559-e09edcce660a" providerId="ADAL" clId="{4782C3F0-101A-4321-9814-D3528C60F802}" dt="2026-04-11T20:45:08.540" v="5" actId="1076"/>
+          <ac:spMkLst>
+            <pc:docMk/>
+            <pc:sldMk cId="0" sldId="256"/>
+            <ac:spMk id="4" creationId="{00000000-0000-0000-0000-000000000000}"/>
+          </ac:spMkLst>
+        </pc:spChg>
+        <pc:spChg chg="mod">
+          <ac:chgData name="Uisang.Hwang" userId="ff31788d-e7f8-473d-8559-e09edcce660a" providerId="ADAL" clId="{4782C3F0-101A-4321-9814-D3528C60F802}" dt="2026-04-11T20:44:47.011" v="2" actId="1076"/>
+          <ac:spMkLst>
+            <pc:docMk/>
+            <pc:sldMk cId="0" sldId="256"/>
+            <ac:spMk id="5" creationId="{00000000-0000-0000-0000-000000000000}"/>
+          </ac:spMkLst>
+        </pc:spChg>
+        <pc:spChg chg="mod">
+          <ac:chgData name="Uisang.Hwang" userId="ff31788d-e7f8-473d-8559-e09edcce660a" providerId="ADAL" clId="{4782C3F0-101A-4321-9814-D3528C60F802}" dt="2026-04-11T20:44:47.011" v="2" actId="1076"/>
+          <ac:spMkLst>
+            <pc:docMk/>
+            <pc:sldMk cId="0" sldId="256"/>
+            <ac:spMk id="6" creationId="{00000000-0000-0000-0000-000000000000}"/>
+          </ac:spMkLst>
+        </pc:spChg>
+      </pc:sldChg>
+    </pc:docChg>
+  </pc:docChgLst>
+</pc:chgInfo>
 </file>
 
 <file path=ppt/slideLayouts/slideLayout1.xml><?xml version="1.0" encoding="utf-8"?>
@@ -145,10 +222,9 @@
           <a:lstStyle/>
           <a:p>
             <a:r>
-              <a:rPr lang="en-US" smtClean="0"/>
+              <a:rPr lang="en-US"/>
               <a:t>Click to edit Master title style</a:t>
             </a:r>
-            <a:endParaRPr lang="en-US"/>
           </a:p>
         </p:txBody>
       </p:sp>
@@ -264,10 +340,9 @@
           </a:lstStyle>
           <a:p>
             <a:r>
-              <a:rPr lang="en-US" smtClean="0"/>
+              <a:rPr lang="en-US"/>
               <a:t>Click to edit Master subtitle style</a:t>
             </a:r>
-            <a:endParaRPr lang="en-US"/>
           </a:p>
         </p:txBody>
       </p:sp>
@@ -288,7 +363,7 @@
           <a:p>
             <a:fld id="{5BCAD085-E8A6-8845-BD4E-CB4CCA059FC4}" type="datetimeFigureOut">
               <a:rPr lang="en-US" smtClean="0"/>
-              <a:t>1/27/13</a:t>
+              <a:t>4/11/2026(Sat)</a:t>
             </a:fld>
             <a:endParaRPr lang="en-US"/>
           </a:p>
@@ -382,10 +457,9 @@
           <a:lstStyle/>
           <a:p>
             <a:r>
-              <a:rPr lang="en-US" smtClean="0"/>
+              <a:rPr lang="en-US"/>
               <a:t>Click to edit Master title style</a:t>
             </a:r>
-            <a:endParaRPr lang="en-US"/>
           </a:p>
         </p:txBody>
       </p:sp>
@@ -406,38 +480,37 @@
           <a:p>
             <a:pPr lvl="0"/>
             <a:r>
-              <a:rPr lang="en-US" smtClean="0"/>
+              <a:rPr lang="en-US"/>
               <a:t>Click to edit Master text styles</a:t>
             </a:r>
           </a:p>
           <a:p>
             <a:pPr lvl="1"/>
             <a:r>
-              <a:rPr lang="en-US" smtClean="0"/>
+              <a:rPr lang="en-US"/>
               <a:t>Second level</a:t>
             </a:r>
           </a:p>
           <a:p>
             <a:pPr lvl="2"/>
             <a:r>
-              <a:rPr lang="en-US" smtClean="0"/>
+              <a:rPr lang="en-US"/>
               <a:t>Third level</a:t>
             </a:r>
           </a:p>
           <a:p>
             <a:pPr lvl="3"/>
             <a:r>
-              <a:rPr lang="en-US" smtClean="0"/>
+              <a:rPr lang="en-US"/>
               <a:t>Fourth level</a:t>
             </a:r>
           </a:p>
           <a:p>
             <a:pPr lvl="4"/>
             <a:r>
-              <a:rPr lang="en-US" smtClean="0"/>
+              <a:rPr lang="en-US"/>
               <a:t>Fifth level</a:t>
             </a:r>
-            <a:endParaRPr lang="en-US"/>
           </a:p>
         </p:txBody>
       </p:sp>
@@ -458,7 +531,7 @@
           <a:p>
             <a:fld id="{5BCAD085-E8A6-8845-BD4E-CB4CCA059FC4}" type="datetimeFigureOut">
               <a:rPr lang="en-US" smtClean="0"/>
-              <a:t>1/27/13</a:t>
+              <a:t>4/11/2026(Sat)</a:t>
             </a:fld>
             <a:endParaRPr lang="en-US"/>
           </a:p>
@@ -557,10 +630,9 @@
           <a:lstStyle/>
           <a:p>
             <a:r>
-              <a:rPr lang="en-US" smtClean="0"/>
+              <a:rPr lang="en-US"/>
               <a:t>Click to edit Master title style</a:t>
             </a:r>
-            <a:endParaRPr lang="en-US"/>
           </a:p>
         </p:txBody>
       </p:sp>
@@ -586,38 +658,37 @@
           <a:p>
             <a:pPr lvl="0"/>
             <a:r>
-              <a:rPr lang="en-US" smtClean="0"/>
+              <a:rPr lang="en-US"/>
               <a:t>Click to edit Master text styles</a:t>
             </a:r>
           </a:p>
           <a:p>
             <a:pPr lvl="1"/>
             <a:r>
-              <a:rPr lang="en-US" smtClean="0"/>
+              <a:rPr lang="en-US"/>
               <a:t>Second level</a:t>
             </a:r>
           </a:p>
           <a:p>
             <a:pPr lvl="2"/>
             <a:r>
-              <a:rPr lang="en-US" smtClean="0"/>
+              <a:rPr lang="en-US"/>
               <a:t>Third level</a:t>
             </a:r>
           </a:p>
           <a:p>
             <a:pPr lvl="3"/>
             <a:r>
-              <a:rPr lang="en-US" smtClean="0"/>
+              <a:rPr lang="en-US"/>
               <a:t>Fourth level</a:t>
             </a:r>
           </a:p>
           <a:p>
             <a:pPr lvl="4"/>
             <a:r>
-              <a:rPr lang="en-US" smtClean="0"/>
+              <a:rPr lang="en-US"/>
               <a:t>Fifth level</a:t>
             </a:r>
-            <a:endParaRPr lang="en-US"/>
           </a:p>
         </p:txBody>
       </p:sp>
@@ -638,7 +709,7 @@
           <a:p>
             <a:fld id="{5BCAD085-E8A6-8845-BD4E-CB4CCA059FC4}" type="datetimeFigureOut">
               <a:rPr lang="en-US" smtClean="0"/>
-              <a:t>1/27/13</a:t>
+              <a:t>4/11/2026(Sat)</a:t>
             </a:fld>
             <a:endParaRPr lang="en-US"/>
           </a:p>
@@ -732,10 +803,9 @@
           <a:lstStyle/>
           <a:p>
             <a:r>
-              <a:rPr lang="en-US" smtClean="0"/>
+              <a:rPr lang="en-US"/>
               <a:t>Click to edit Master title style</a:t>
             </a:r>
-            <a:endParaRPr lang="en-US"/>
           </a:p>
         </p:txBody>
       </p:sp>
@@ -756,38 +826,37 @@
           <a:p>
             <a:pPr lvl="0"/>
             <a:r>
-              <a:rPr lang="en-US" smtClean="0"/>
+              <a:rPr lang="en-US"/>
               <a:t>Click to edit Master text styles</a:t>
             </a:r>
           </a:p>
           <a:p>
             <a:pPr lvl="1"/>
             <a:r>
-              <a:rPr lang="en-US" smtClean="0"/>
+              <a:rPr lang="en-US"/>
               <a:t>Second level</a:t>
             </a:r>
           </a:p>
           <a:p>
             <a:pPr lvl="2"/>
             <a:r>
-              <a:rPr lang="en-US" smtClean="0"/>
+              <a:rPr lang="en-US"/>
               <a:t>Third level</a:t>
             </a:r>
           </a:p>
           <a:p>
             <a:pPr lvl="3"/>
             <a:r>
-              <a:rPr lang="en-US" smtClean="0"/>
+              <a:rPr lang="en-US"/>
               <a:t>Fourth level</a:t>
             </a:r>
           </a:p>
           <a:p>
             <a:pPr lvl="4"/>
             <a:r>
-              <a:rPr lang="en-US" smtClean="0"/>
+              <a:rPr lang="en-US"/>
               <a:t>Fifth level</a:t>
             </a:r>
-            <a:endParaRPr lang="en-US"/>
           </a:p>
         </p:txBody>
       </p:sp>
@@ -808,7 +877,7 @@
           <a:p>
             <a:fld id="{5BCAD085-E8A6-8845-BD4E-CB4CCA059FC4}" type="datetimeFigureOut">
               <a:rPr lang="en-US" smtClean="0"/>
-              <a:t>1/27/13</a:t>
+              <a:t>4/11/2026(Sat)</a:t>
             </a:fld>
             <a:endParaRPr lang="en-US"/>
           </a:p>
@@ -911,10 +980,9 @@
           </a:lstStyle>
           <a:p>
             <a:r>
-              <a:rPr lang="en-US" smtClean="0"/>
+              <a:rPr lang="en-US"/>
               <a:t>Click to edit Master title style</a:t>
             </a:r>
-            <a:endParaRPr lang="en-US"/>
           </a:p>
         </p:txBody>
       </p:sp>
@@ -1031,7 +1099,7 @@
           <a:p>
             <a:pPr lvl="0"/>
             <a:r>
-              <a:rPr lang="en-US" smtClean="0"/>
+              <a:rPr lang="en-US"/>
               <a:t>Click to edit Master text styles</a:t>
             </a:r>
           </a:p>
@@ -1054,7 +1122,7 @@
           <a:p>
             <a:fld id="{5BCAD085-E8A6-8845-BD4E-CB4CCA059FC4}" type="datetimeFigureOut">
               <a:rPr lang="en-US" smtClean="0"/>
-              <a:t>1/27/13</a:t>
+              <a:t>4/11/2026(Sat)</a:t>
             </a:fld>
             <a:endParaRPr lang="en-US"/>
           </a:p>
@@ -1148,10 +1216,9 @@
           <a:lstStyle/>
           <a:p>
             <a:r>
-              <a:rPr lang="en-US" smtClean="0"/>
+              <a:rPr lang="en-US"/>
               <a:t>Click to edit Master title style</a:t>
             </a:r>
-            <a:endParaRPr lang="en-US"/>
           </a:p>
         </p:txBody>
       </p:sp>
@@ -1205,38 +1272,37 @@
           <a:p>
             <a:pPr lvl="0"/>
             <a:r>
-              <a:rPr lang="en-US" smtClean="0"/>
+              <a:rPr lang="en-US"/>
               <a:t>Click to edit Master text styles</a:t>
             </a:r>
           </a:p>
           <a:p>
             <a:pPr lvl="1"/>
             <a:r>
-              <a:rPr lang="en-US" smtClean="0"/>
+              <a:rPr lang="en-US"/>
               <a:t>Second level</a:t>
             </a:r>
           </a:p>
           <a:p>
             <a:pPr lvl="2"/>
             <a:r>
-              <a:rPr lang="en-US" smtClean="0"/>
+              <a:rPr lang="en-US"/>
               <a:t>Third level</a:t>
             </a:r>
           </a:p>
           <a:p>
             <a:pPr lvl="3"/>
             <a:r>
-              <a:rPr lang="en-US" smtClean="0"/>
+              <a:rPr lang="en-US"/>
               <a:t>Fourth level</a:t>
             </a:r>
           </a:p>
           <a:p>
             <a:pPr lvl="4"/>
             <a:r>
-              <a:rPr lang="en-US" smtClean="0"/>
+              <a:rPr lang="en-US"/>
               <a:t>Fifth level</a:t>
             </a:r>
-            <a:endParaRPr lang="en-US"/>
           </a:p>
         </p:txBody>
       </p:sp>
@@ -1290,38 +1356,37 @@
           <a:p>
             <a:pPr lvl="0"/>
             <a:r>
-              <a:rPr lang="en-US" smtClean="0"/>
+              <a:rPr lang="en-US"/>
               <a:t>Click to edit Master text styles</a:t>
             </a:r>
           </a:p>
           <a:p>
             <a:pPr lvl="1"/>
             <a:r>
-              <a:rPr lang="en-US" smtClean="0"/>
+              <a:rPr lang="en-US"/>
               <a:t>Second level</a:t>
             </a:r>
           </a:p>
           <a:p>
             <a:pPr lvl="2"/>
             <a:r>
-              <a:rPr lang="en-US" smtClean="0"/>
+              <a:rPr lang="en-US"/>
               <a:t>Third level</a:t>
             </a:r>
           </a:p>
           <a:p>
             <a:pPr lvl="3"/>
             <a:r>
-              <a:rPr lang="en-US" smtClean="0"/>
+              <a:rPr lang="en-US"/>
               <a:t>Fourth level</a:t>
             </a:r>
           </a:p>
           <a:p>
             <a:pPr lvl="4"/>
             <a:r>
-              <a:rPr lang="en-US" smtClean="0"/>
+              <a:rPr lang="en-US"/>
               <a:t>Fifth level</a:t>
             </a:r>
-            <a:endParaRPr lang="en-US"/>
           </a:p>
         </p:txBody>
       </p:sp>
@@ -1342,7 +1407,7 @@
           <a:p>
             <a:fld id="{5BCAD085-E8A6-8845-BD4E-CB4CCA059FC4}" type="datetimeFigureOut">
               <a:rPr lang="en-US" smtClean="0"/>
-              <a:t>1/27/13</a:t>
+              <a:t>4/11/2026(Sat)</a:t>
             </a:fld>
             <a:endParaRPr lang="en-US"/>
           </a:p>
@@ -1440,10 +1505,9 @@
           </a:lstStyle>
           <a:p>
             <a:r>
-              <a:rPr lang="en-US" smtClean="0"/>
+              <a:rPr lang="en-US"/>
               <a:t>Click to edit Master title style</a:t>
             </a:r>
-            <a:endParaRPr lang="en-US"/>
           </a:p>
         </p:txBody>
       </p:sp>
@@ -1506,7 +1570,7 @@
           <a:p>
             <a:pPr lvl="0"/>
             <a:r>
-              <a:rPr lang="en-US" smtClean="0"/>
+              <a:rPr lang="en-US"/>
               <a:t>Click to edit Master text styles</a:t>
             </a:r>
           </a:p>
@@ -1562,38 +1626,37 @@
           <a:p>
             <a:pPr lvl="0"/>
             <a:r>
-              <a:rPr lang="en-US" smtClean="0"/>
+              <a:rPr lang="en-US"/>
               <a:t>Click to edit Master text styles</a:t>
             </a:r>
           </a:p>
           <a:p>
             <a:pPr lvl="1"/>
             <a:r>
-              <a:rPr lang="en-US" smtClean="0"/>
+              <a:rPr lang="en-US"/>
               <a:t>Second level</a:t>
             </a:r>
           </a:p>
           <a:p>
             <a:pPr lvl="2"/>
             <a:r>
-              <a:rPr lang="en-US" smtClean="0"/>
+              <a:rPr lang="en-US"/>
               <a:t>Third level</a:t>
             </a:r>
           </a:p>
           <a:p>
             <a:pPr lvl="3"/>
             <a:r>
-              <a:rPr lang="en-US" smtClean="0"/>
+              <a:rPr lang="en-US"/>
               <a:t>Fourth level</a:t>
             </a:r>
           </a:p>
           <a:p>
             <a:pPr lvl="4"/>
             <a:r>
-              <a:rPr lang="en-US" smtClean="0"/>
+              <a:rPr lang="en-US"/>
               <a:t>Fifth level</a:t>
             </a:r>
-            <a:endParaRPr lang="en-US"/>
           </a:p>
         </p:txBody>
       </p:sp>
@@ -1656,7 +1719,7 @@
           <a:p>
             <a:pPr lvl="0"/>
             <a:r>
-              <a:rPr lang="en-US" smtClean="0"/>
+              <a:rPr lang="en-US"/>
               <a:t>Click to edit Master text styles</a:t>
             </a:r>
           </a:p>
@@ -1712,38 +1775,37 @@
           <a:p>
             <a:pPr lvl="0"/>
             <a:r>
-              <a:rPr lang="en-US" smtClean="0"/>
+              <a:rPr lang="en-US"/>
               <a:t>Click to edit Master text styles</a:t>
             </a:r>
           </a:p>
           <a:p>
             <a:pPr lvl="1"/>
             <a:r>
-              <a:rPr lang="en-US" smtClean="0"/>
+              <a:rPr lang="en-US"/>
               <a:t>Second level</a:t>
             </a:r>
           </a:p>
           <a:p>
             <a:pPr lvl="2"/>
             <a:r>
-              <a:rPr lang="en-US" smtClean="0"/>
+              <a:rPr lang="en-US"/>
               <a:t>Third level</a:t>
             </a:r>
           </a:p>
           <a:p>
             <a:pPr lvl="3"/>
             <a:r>
-              <a:rPr lang="en-US" smtClean="0"/>
+              <a:rPr lang="en-US"/>
               <a:t>Fourth level</a:t>
             </a:r>
           </a:p>
           <a:p>
             <a:pPr lvl="4"/>
             <a:r>
-              <a:rPr lang="en-US" smtClean="0"/>
+              <a:rPr lang="en-US"/>
               <a:t>Fifth level</a:t>
             </a:r>
-            <a:endParaRPr lang="en-US"/>
           </a:p>
         </p:txBody>
       </p:sp>
@@ -1764,7 +1826,7 @@
           <a:p>
             <a:fld id="{5BCAD085-E8A6-8845-BD4E-CB4CCA059FC4}" type="datetimeFigureOut">
               <a:rPr lang="en-US" smtClean="0"/>
-              <a:t>1/27/13</a:t>
+              <a:t>4/11/2026(Sat)</a:t>
             </a:fld>
             <a:endParaRPr lang="en-US"/>
           </a:p>
@@ -1858,10 +1920,9 @@
           <a:lstStyle/>
           <a:p>
             <a:r>
-              <a:rPr lang="en-US" smtClean="0"/>
+              <a:rPr lang="en-US"/>
               <a:t>Click to edit Master title style</a:t>
             </a:r>
-            <a:endParaRPr lang="en-US"/>
           </a:p>
         </p:txBody>
       </p:sp>
@@ -1882,7 +1943,7 @@
           <a:p>
             <a:fld id="{5BCAD085-E8A6-8845-BD4E-CB4CCA059FC4}" type="datetimeFigureOut">
               <a:rPr lang="en-US" smtClean="0"/>
-              <a:t>1/27/13</a:t>
+              <a:t>4/11/2026(Sat)</a:t>
             </a:fld>
             <a:endParaRPr lang="en-US"/>
           </a:p>
@@ -1977,7 +2038,7 @@
           <a:p>
             <a:fld id="{5BCAD085-E8A6-8845-BD4E-CB4CCA059FC4}" type="datetimeFigureOut">
               <a:rPr lang="en-US" smtClean="0"/>
-              <a:t>1/27/13</a:t>
+              <a:t>4/11/2026(Sat)</a:t>
             </a:fld>
             <a:endParaRPr lang="en-US"/>
           </a:p>
@@ -2080,10 +2141,9 @@
           </a:lstStyle>
           <a:p>
             <a:r>
-              <a:rPr lang="en-US" smtClean="0"/>
+              <a:rPr lang="en-US"/>
               <a:t>Click to edit Master title style</a:t>
             </a:r>
-            <a:endParaRPr lang="en-US"/>
           </a:p>
         </p:txBody>
       </p:sp>
@@ -2137,38 +2197,37 @@
           <a:p>
             <a:pPr lvl="0"/>
             <a:r>
-              <a:rPr lang="en-US" smtClean="0"/>
+              <a:rPr lang="en-US"/>
               <a:t>Click to edit Master text styles</a:t>
             </a:r>
           </a:p>
           <a:p>
             <a:pPr lvl="1"/>
             <a:r>
-              <a:rPr lang="en-US" smtClean="0"/>
+              <a:rPr lang="en-US"/>
               <a:t>Second level</a:t>
             </a:r>
           </a:p>
           <a:p>
             <a:pPr lvl="2"/>
             <a:r>
-              <a:rPr lang="en-US" smtClean="0"/>
+              <a:rPr lang="en-US"/>
               <a:t>Third level</a:t>
             </a:r>
           </a:p>
           <a:p>
             <a:pPr lvl="3"/>
             <a:r>
-              <a:rPr lang="en-US" smtClean="0"/>
+              <a:rPr lang="en-US"/>
               <a:t>Fourth level</a:t>
             </a:r>
           </a:p>
           <a:p>
             <a:pPr lvl="4"/>
             <a:r>
-              <a:rPr lang="en-US" smtClean="0"/>
+              <a:rPr lang="en-US"/>
               <a:t>Fifth level</a:t>
             </a:r>
-            <a:endParaRPr lang="en-US"/>
           </a:p>
         </p:txBody>
       </p:sp>
@@ -2231,7 +2290,7 @@
           <a:p>
             <a:pPr lvl="0"/>
             <a:r>
-              <a:rPr lang="en-US" smtClean="0"/>
+              <a:rPr lang="en-US"/>
               <a:t>Click to edit Master text styles</a:t>
             </a:r>
           </a:p>
@@ -2254,7 +2313,7 @@
           <a:p>
             <a:fld id="{5BCAD085-E8A6-8845-BD4E-CB4CCA059FC4}" type="datetimeFigureOut">
               <a:rPr lang="en-US" smtClean="0"/>
-              <a:t>1/27/13</a:t>
+              <a:t>4/11/2026(Sat)</a:t>
             </a:fld>
             <a:endParaRPr lang="en-US"/>
           </a:p>
@@ -2357,10 +2416,9 @@
           </a:lstStyle>
           <a:p>
             <a:r>
-              <a:rPr lang="en-US" smtClean="0"/>
+              <a:rPr lang="en-US"/>
               <a:t>Click to edit Master title style</a:t>
             </a:r>
-            <a:endParaRPr lang="en-US"/>
           </a:p>
         </p:txBody>
       </p:sp>
@@ -2484,7 +2542,7 @@
           <a:p>
             <a:pPr lvl="0"/>
             <a:r>
-              <a:rPr lang="en-US" smtClean="0"/>
+              <a:rPr lang="en-US"/>
               <a:t>Click to edit Master text styles</a:t>
             </a:r>
           </a:p>
@@ -2507,7 +2565,7 @@
           <a:p>
             <a:fld id="{5BCAD085-E8A6-8845-BD4E-CB4CCA059FC4}" type="datetimeFigureOut">
               <a:rPr lang="en-US" smtClean="0"/>
-              <a:t>1/27/13</a:t>
+              <a:t>4/11/2026(Sat)</a:t>
             </a:fld>
             <a:endParaRPr lang="en-US"/>
           </a:p>
@@ -2616,10 +2674,9 @@
           <a:lstStyle/>
           <a:p>
             <a:r>
-              <a:rPr lang="en-US" smtClean="0"/>
+              <a:rPr lang="en-US"/>
               <a:t>Click to edit Master title style</a:t>
             </a:r>
-            <a:endParaRPr lang="en-US"/>
           </a:p>
         </p:txBody>
       </p:sp>
@@ -2650,38 +2707,37 @@
           <a:p>
             <a:pPr lvl="0"/>
             <a:r>
-              <a:rPr lang="en-US" smtClean="0"/>
+              <a:rPr lang="en-US"/>
               <a:t>Click to edit Master text styles</a:t>
             </a:r>
           </a:p>
           <a:p>
             <a:pPr lvl="1"/>
             <a:r>
-              <a:rPr lang="en-US" smtClean="0"/>
+              <a:rPr lang="en-US"/>
               <a:t>Second level</a:t>
             </a:r>
           </a:p>
           <a:p>
             <a:pPr lvl="2"/>
             <a:r>
-              <a:rPr lang="en-US" smtClean="0"/>
+              <a:rPr lang="en-US"/>
               <a:t>Third level</a:t>
             </a:r>
           </a:p>
           <a:p>
             <a:pPr lvl="3"/>
             <a:r>
-              <a:rPr lang="en-US" smtClean="0"/>
+              <a:rPr lang="en-US"/>
               <a:t>Fourth level</a:t>
             </a:r>
           </a:p>
           <a:p>
             <a:pPr lvl="4"/>
             <a:r>
-              <a:rPr lang="en-US" smtClean="0"/>
+              <a:rPr lang="en-US"/>
               <a:t>Fifth level</a:t>
             </a:r>
-            <a:endParaRPr lang="en-US"/>
           </a:p>
         </p:txBody>
       </p:sp>
@@ -2720,7 +2776,7 @@
           <a:p>
             <a:fld id="{5BCAD085-E8A6-8845-BD4E-CB4CCA059FC4}" type="datetimeFigureOut">
               <a:rPr lang="en-US" smtClean="0"/>
-              <a:t>1/27/13</a:t>
+              <a:t>4/11/2026(Sat)</a:t>
             </a:fld>
             <a:endParaRPr lang="en-US"/>
           </a:p>
@@ -3079,7 +3135,7 @@
 </file>
 
 <file path=ppt/slides/slide1.xml><?xml version="1.0" encoding="utf-8"?>
-<p:sld xmlns:a="http://schemas.openxmlformats.org/drawingml/2006/main" xmlns:p="http://schemas.openxmlformats.org/presentationml/2006/main" xmlns:r="http://schemas.openxmlformats.org/officeDocument/2006/relationships">
+<p:sld xmlns:a="http://schemas.openxmlformats.org/drawingml/2006/main" xmlns:r="http://schemas.openxmlformats.org/officeDocument/2006/relationships" xmlns:p="http://schemas.openxmlformats.org/presentationml/2006/main">
   <p:cSld>
     <p:spTree>
       <p:nvGrpSpPr>
@@ -3087,7 +3143,14 @@
         <p:cNvGrpSpPr/>
         <p:nvPr/>
       </p:nvGrpSpPr>
-      <p:grpSpPr/>
+      <p:grpSpPr>
+        <a:xfrm>
+          <a:off x="0" y="0"/>
+          <a:ext cx="0" cy="0"/>
+          <a:chOff x="0" y="0"/>
+          <a:chExt cx="0" cy="0"/>
+        </a:xfrm>
+      </p:grpSpPr>
       <p:sp>
         <p:nvSpPr>
           <p:cNvPr id="2" name="Freeform 1"/>
@@ -3096,8 +3159,8 @@
         </p:nvSpPr>
         <p:spPr>
           <a:xfrm>
-            <a:off x="0" y="0"/>
-            <a:ext cx="6858000" cy="6333793"/>
+            <a:off x="1018309" y="1579418"/>
+            <a:ext cx="6858000" cy="2902988"/>
           </a:xfrm>
           <a:custGeom>
             <a:avLst/>
@@ -3106,381 +3169,1056 @@
             <a:cxnLst/>
             <a:rect l="l" t="t" r="r" b="b"/>
             <a:pathLst>
-              <a:path w="6858000" h="6333793">
+              <a:path w="6858000" h="2902988">
                 <a:moveTo>
-                  <a:pt x="0" y="2177615"/>
+                  <a:pt x="0" y="998073"/>
                 </a:moveTo>
                 <a:lnTo>
-                  <a:pt x="5231" y="2472344"/>
-                </a:lnTo>
-                <a:lnTo>
-                  <a:pt x="20899" y="2765589"/>
-                </a:lnTo>
-                <a:lnTo>
-                  <a:pt x="46924" y="3055874"/>
-                </a:lnTo>
-                <a:lnTo>
-                  <a:pt x="83176" y="3341737"/>
-                </a:lnTo>
-                <a:lnTo>
-                  <a:pt x="129473" y="3621739"/>
-                </a:lnTo>
-                <a:lnTo>
-                  <a:pt x="185580" y="3894471"/>
-                </a:lnTo>
-                <a:lnTo>
-                  <a:pt x="251215" y="4158559"/>
-                </a:lnTo>
-                <a:lnTo>
-                  <a:pt x="326049" y="4412674"/>
-                </a:lnTo>
-                <a:lnTo>
-                  <a:pt x="409704" y="4655536"/>
-                </a:lnTo>
-                <a:lnTo>
-                  <a:pt x="501759" y="4885923"/>
-                </a:lnTo>
-                <a:lnTo>
-                  <a:pt x="601751" y="5102674"/>
-                </a:lnTo>
-                <a:lnTo>
-                  <a:pt x="709176" y="5304699"/>
-                </a:lnTo>
-                <a:lnTo>
-                  <a:pt x="823493" y="5490980"/>
-                </a:lnTo>
-                <a:lnTo>
-                  <a:pt x="944127" y="5660580"/>
-                </a:lnTo>
-                <a:lnTo>
-                  <a:pt x="1070471" y="5812645"/>
-                </a:lnTo>
-                <a:lnTo>
-                  <a:pt x="1201888" y="5946408"/>
-                </a:lnTo>
-                <a:lnTo>
-                  <a:pt x="1337717" y="6061197"/>
-                </a:lnTo>
-                <a:lnTo>
-                  <a:pt x="1477274" y="6156434"/>
-                </a:lnTo>
-                <a:lnTo>
-                  <a:pt x="1619857" y="6231639"/>
-                </a:lnTo>
-                <a:lnTo>
-                  <a:pt x="1764746" y="6286434"/>
-                </a:lnTo>
-                <a:lnTo>
-                  <a:pt x="1911214" y="6320542"/>
-                </a:lnTo>
-                <a:lnTo>
-                  <a:pt x="2058522" y="6333793"/>
-                </a:lnTo>
-                <a:lnTo>
-                  <a:pt x="2205930" y="6326119"/>
-                </a:lnTo>
-                <a:lnTo>
-                  <a:pt x="2352694" y="6297558"/>
-                </a:lnTo>
-                <a:lnTo>
-                  <a:pt x="2498076" y="6248255"/>
-                </a:lnTo>
-                <a:lnTo>
-                  <a:pt x="2641344" y="6178459"/>
-                </a:lnTo>
-                <a:lnTo>
-                  <a:pt x="2781777" y="6088519"/>
-                </a:lnTo>
-                <a:lnTo>
-                  <a:pt x="2918668" y="5978890"/>
-                </a:lnTo>
-                <a:lnTo>
-                  <a:pt x="3051327" y="5850123"/>
-                </a:lnTo>
-                <a:lnTo>
-                  <a:pt x="3179086" y="5702866"/>
-                </a:lnTo>
-                <a:lnTo>
-                  <a:pt x="3301303" y="5537861"/>
-                </a:lnTo>
-                <a:lnTo>
-                  <a:pt x="3417362" y="5355938"/>
-                </a:lnTo>
-                <a:lnTo>
-                  <a:pt x="3526679" y="5158014"/>
-                </a:lnTo>
-                <a:lnTo>
-                  <a:pt x="3628703" y="4945085"/>
-                </a:lnTo>
-                <a:lnTo>
-                  <a:pt x="3722921" y="4718222"/>
-                </a:lnTo>
-                <a:lnTo>
-                  <a:pt x="3808858" y="4478569"/>
-                </a:lnTo>
-                <a:lnTo>
-                  <a:pt x="3886082" y="4227331"/>
-                </a:lnTo>
-                <a:lnTo>
-                  <a:pt x="3954204" y="3965774"/>
-                </a:lnTo>
-                <a:lnTo>
-                  <a:pt x="4012881" y="3695214"/>
-                </a:lnTo>
-                <a:lnTo>
-                  <a:pt x="4061818" y="3417014"/>
-                </a:lnTo>
-                <a:lnTo>
-                  <a:pt x="4100767" y="3132573"/>
-                </a:lnTo>
-                <a:lnTo>
-                  <a:pt x="4129534" y="2843325"/>
-                </a:lnTo>
-                <a:lnTo>
-                  <a:pt x="4147973" y="2550725"/>
-                </a:lnTo>
-                <a:lnTo>
-                  <a:pt x="4155991" y="2256247"/>
-                </a:lnTo>
-                <a:lnTo>
-                  <a:pt x="4153549" y="1961373"/>
-                </a:lnTo>
-                <a:lnTo>
-                  <a:pt x="4140657" y="1667588"/>
-                </a:lnTo>
-                <a:lnTo>
-                  <a:pt x="4117382" y="1376370"/>
-                </a:lnTo>
-                <a:lnTo>
-                  <a:pt x="4083841" y="1089186"/>
-                </a:lnTo>
-                <a:lnTo>
-                  <a:pt x="4040202" y="807482"/>
-                </a:lnTo>
-                <a:lnTo>
-                  <a:pt x="4040202" y="807482"/>
-                </a:lnTo>
-                <a:lnTo>
-                  <a:pt x="4016571" y="693524"/>
-                </a:lnTo>
-                <a:lnTo>
-                  <a:pt x="3986403" y="584680"/>
-                </a:lnTo>
-                <a:lnTo>
-                  <a:pt x="3950034" y="482162"/>
-                </a:lnTo>
-                <a:lnTo>
-                  <a:pt x="3907868" y="387109"/>
-                </a:lnTo>
-                <a:lnTo>
-                  <a:pt x="3860374" y="300579"/>
-                </a:lnTo>
-                <a:lnTo>
-                  <a:pt x="3808081" y="223535"/>
-                </a:lnTo>
-                <a:lnTo>
-                  <a:pt x="3751571" y="156834"/>
-                </a:lnTo>
-                <a:lnTo>
-                  <a:pt x="3691471" y="101219"/>
-                </a:lnTo>
-                <a:lnTo>
-                  <a:pt x="3628452" y="57307"/>
-                </a:lnTo>
-                <a:lnTo>
-                  <a:pt x="3563214" y="25588"/>
-                </a:lnTo>
-                <a:lnTo>
-                  <a:pt x="3496482" y="6415"/>
-                </a:lnTo>
-                <a:lnTo>
-                  <a:pt x="3429000" y="0"/>
-                </a:lnTo>
-                <a:lnTo>
-                  <a:pt x="3361517" y="6415"/>
-                </a:lnTo>
-                <a:lnTo>
-                  <a:pt x="3294785" y="25588"/>
-                </a:lnTo>
-                <a:lnTo>
-                  <a:pt x="3229547" y="57307"/>
-                </a:lnTo>
-                <a:lnTo>
-                  <a:pt x="3166528" y="101219"/>
-                </a:lnTo>
-                <a:lnTo>
-                  <a:pt x="3106428" y="156834"/>
-                </a:lnTo>
-                <a:lnTo>
-                  <a:pt x="3049918" y="223535"/>
-                </a:lnTo>
-                <a:lnTo>
-                  <a:pt x="2997625" y="300579"/>
-                </a:lnTo>
-                <a:lnTo>
-                  <a:pt x="2950131" y="387109"/>
-                </a:lnTo>
-                <a:lnTo>
-                  <a:pt x="2907965" y="482162"/>
-                </a:lnTo>
-                <a:lnTo>
-                  <a:pt x="2871596" y="584680"/>
-                </a:lnTo>
-                <a:lnTo>
-                  <a:pt x="2841428" y="693524"/>
-                </a:lnTo>
-                <a:lnTo>
-                  <a:pt x="2817797" y="807482"/>
-                </a:lnTo>
-                <a:lnTo>
-                  <a:pt x="2817797" y="807482"/>
-                </a:lnTo>
-                <a:lnTo>
-                  <a:pt x="2774158" y="1089186"/>
-                </a:lnTo>
-                <a:lnTo>
-                  <a:pt x="2740617" y="1376370"/>
-                </a:lnTo>
-                <a:lnTo>
-                  <a:pt x="2717342" y="1667588"/>
-                </a:lnTo>
-                <a:lnTo>
-                  <a:pt x="2704450" y="1961373"/>
-                </a:lnTo>
-                <a:lnTo>
-                  <a:pt x="2702008" y="2256247"/>
-                </a:lnTo>
-                <a:lnTo>
-                  <a:pt x="2710026" y="2550725"/>
-                </a:lnTo>
-                <a:lnTo>
-                  <a:pt x="2728465" y="2843325"/>
-                </a:lnTo>
-                <a:lnTo>
-                  <a:pt x="2757232" y="3132573"/>
-                </a:lnTo>
-                <a:lnTo>
-                  <a:pt x="2796181" y="3417014"/>
-                </a:lnTo>
-                <a:lnTo>
-                  <a:pt x="2845118" y="3695214"/>
-                </a:lnTo>
-                <a:lnTo>
-                  <a:pt x="2903795" y="3965774"/>
-                </a:lnTo>
-                <a:lnTo>
-                  <a:pt x="2971917" y="4227331"/>
-                </a:lnTo>
-                <a:lnTo>
-                  <a:pt x="3049141" y="4478569"/>
-                </a:lnTo>
-                <a:lnTo>
-                  <a:pt x="3135078" y="4718222"/>
-                </a:lnTo>
-                <a:lnTo>
-                  <a:pt x="3229296" y="4945085"/>
-                </a:lnTo>
-                <a:lnTo>
-                  <a:pt x="3331320" y="5158014"/>
-                </a:lnTo>
-                <a:lnTo>
-                  <a:pt x="3440637" y="5355938"/>
-                </a:lnTo>
-                <a:lnTo>
-                  <a:pt x="3556696" y="5537861"/>
-                </a:lnTo>
-                <a:lnTo>
-                  <a:pt x="3678913" y="5702866"/>
-                </a:lnTo>
-                <a:lnTo>
-                  <a:pt x="3806672" y="5850123"/>
-                </a:lnTo>
-                <a:lnTo>
-                  <a:pt x="3939331" y="5978890"/>
-                </a:lnTo>
-                <a:lnTo>
-                  <a:pt x="4076222" y="6088519"/>
-                </a:lnTo>
-                <a:lnTo>
-                  <a:pt x="4216655" y="6178459"/>
-                </a:lnTo>
-                <a:lnTo>
-                  <a:pt x="4359923" y="6248255"/>
-                </a:lnTo>
-                <a:lnTo>
-                  <a:pt x="4505305" y="6297558"/>
-                </a:lnTo>
-                <a:lnTo>
-                  <a:pt x="4652069" y="6326119"/>
-                </a:lnTo>
-                <a:lnTo>
-                  <a:pt x="4799477" y="6333793"/>
-                </a:lnTo>
-                <a:lnTo>
-                  <a:pt x="4946785" y="6320542"/>
-                </a:lnTo>
-                <a:lnTo>
-                  <a:pt x="5093253" y="6286434"/>
-                </a:lnTo>
-                <a:lnTo>
-                  <a:pt x="5238142" y="6231639"/>
-                </a:lnTo>
-                <a:lnTo>
-                  <a:pt x="5380725" y="6156434"/>
-                </a:lnTo>
-                <a:lnTo>
-                  <a:pt x="5520282" y="6061197"/>
-                </a:lnTo>
-                <a:lnTo>
-                  <a:pt x="5656111" y="5946408"/>
-                </a:lnTo>
-                <a:lnTo>
-                  <a:pt x="5787528" y="5812645"/>
-                </a:lnTo>
-                <a:lnTo>
-                  <a:pt x="5913872" y="5660580"/>
-                </a:lnTo>
-                <a:lnTo>
-                  <a:pt x="6034506" y="5490980"/>
-                </a:lnTo>
-                <a:lnTo>
-                  <a:pt x="6148823" y="5304699"/>
-                </a:lnTo>
-                <a:lnTo>
-                  <a:pt x="6256248" y="5102674"/>
-                </a:lnTo>
-                <a:lnTo>
-                  <a:pt x="6356240" y="4885923"/>
-                </a:lnTo>
-                <a:lnTo>
-                  <a:pt x="6448295" y="4655536"/>
-                </a:lnTo>
-                <a:lnTo>
-                  <a:pt x="6531950" y="4412674"/>
-                </a:lnTo>
-                <a:lnTo>
-                  <a:pt x="6606784" y="4158559"/>
-                </a:lnTo>
-                <a:lnTo>
-                  <a:pt x="6672419" y="3894471"/>
-                </a:lnTo>
-                <a:lnTo>
-                  <a:pt x="6728526" y="3621739"/>
-                </a:lnTo>
-                <a:lnTo>
-                  <a:pt x="6774823" y="3341737"/>
-                </a:lnTo>
-                <a:lnTo>
-                  <a:pt x="6811075" y="3055874"/>
-                </a:lnTo>
-                <a:lnTo>
-                  <a:pt x="6837100" y="2765589"/>
-                </a:lnTo>
-                <a:lnTo>
-                  <a:pt x="6852768" y="2472344"/>
-                </a:lnTo>
-                <a:lnTo>
-                  <a:pt x="6858000" y="2177615"/>
+                  <a:pt x="2397" y="1133157"/>
+                </a:lnTo>
+                <a:lnTo>
+                  <a:pt x="9578" y="1267561"/>
+                </a:lnTo>
+                <a:lnTo>
+                  <a:pt x="21507" y="1400609"/>
+                </a:lnTo>
+                <a:lnTo>
+                  <a:pt x="38122" y="1531629"/>
+                </a:lnTo>
+                <a:lnTo>
+                  <a:pt x="59341" y="1659964"/>
+                </a:lnTo>
+                <a:lnTo>
+                  <a:pt x="85057" y="1784966"/>
+                </a:lnTo>
+                <a:lnTo>
+                  <a:pt x="115140" y="1906006"/>
+                </a:lnTo>
+                <a:lnTo>
+                  <a:pt x="149439" y="2022475"/>
+                </a:lnTo>
+                <a:lnTo>
+                  <a:pt x="187781" y="2133787"/>
+                </a:lnTo>
+                <a:lnTo>
+                  <a:pt x="229973" y="2239381"/>
+                </a:lnTo>
+                <a:lnTo>
+                  <a:pt x="275802" y="2338725"/>
+                </a:lnTo>
+                <a:lnTo>
+                  <a:pt x="325039" y="2431320"/>
+                </a:lnTo>
+                <a:lnTo>
+                  <a:pt x="377434" y="2516699"/>
+                </a:lnTo>
+                <a:lnTo>
+                  <a:pt x="432725" y="2594432"/>
+                </a:lnTo>
+                <a:lnTo>
+                  <a:pt x="490632" y="2664129"/>
+                </a:lnTo>
+                <a:lnTo>
+                  <a:pt x="550865" y="2725437"/>
+                </a:lnTo>
+                <a:lnTo>
+                  <a:pt x="613120" y="2778049"/>
+                </a:lnTo>
+                <a:lnTo>
+                  <a:pt x="677084" y="2821699"/>
+                </a:lnTo>
+                <a:lnTo>
+                  <a:pt x="742434" y="2856168"/>
+                </a:lnTo>
+                <a:lnTo>
+                  <a:pt x="808842" y="2881282"/>
+                </a:lnTo>
+                <a:lnTo>
+                  <a:pt x="875973" y="2896915"/>
+                </a:lnTo>
+                <a:lnTo>
+                  <a:pt x="943489" y="2902988"/>
+                </a:lnTo>
+                <a:lnTo>
+                  <a:pt x="1011051" y="2899471"/>
+                </a:lnTo>
+                <a:lnTo>
+                  <a:pt x="1078318" y="2886381"/>
+                </a:lnTo>
+                <a:lnTo>
+                  <a:pt x="1144951" y="2863783"/>
+                </a:lnTo>
+                <a:lnTo>
+                  <a:pt x="1210616" y="2831793"/>
+                </a:lnTo>
+                <a:lnTo>
+                  <a:pt x="1274981" y="2790571"/>
+                </a:lnTo>
+                <a:lnTo>
+                  <a:pt x="1337722" y="2740324"/>
+                </a:lnTo>
+                <a:lnTo>
+                  <a:pt x="1398524" y="2681306"/>
+                </a:lnTo>
+                <a:lnTo>
+                  <a:pt x="1457081" y="2613813"/>
+                </a:lnTo>
+                <a:lnTo>
+                  <a:pt x="1513097" y="2538186"/>
+                </a:lnTo>
+                <a:lnTo>
+                  <a:pt x="1566291" y="2454805"/>
+                </a:lnTo>
+                <a:lnTo>
+                  <a:pt x="1616394" y="2364090"/>
+                </a:lnTo>
+                <a:lnTo>
+                  <a:pt x="1663155" y="2266497"/>
+                </a:lnTo>
+                <a:lnTo>
+                  <a:pt x="1706338" y="2162518"/>
+                </a:lnTo>
+                <a:lnTo>
+                  <a:pt x="1745726" y="2052677"/>
+                </a:lnTo>
+                <a:lnTo>
+                  <a:pt x="1781121" y="1937527"/>
+                </a:lnTo>
+                <a:lnTo>
+                  <a:pt x="1812343" y="1817646"/>
+                </a:lnTo>
+                <a:lnTo>
+                  <a:pt x="1839237" y="1693640"/>
+                </a:lnTo>
+                <a:lnTo>
+                  <a:pt x="1861666" y="1566131"/>
+                </a:lnTo>
+                <a:lnTo>
+                  <a:pt x="1879518" y="1435762"/>
+                </a:lnTo>
+                <a:lnTo>
+                  <a:pt x="1892703" y="1303190"/>
+                </a:lnTo>
+                <a:lnTo>
+                  <a:pt x="1901154" y="1169082"/>
+                </a:lnTo>
+                <a:lnTo>
+                  <a:pt x="1904829" y="1034113"/>
+                </a:lnTo>
+                <a:lnTo>
+                  <a:pt x="1903710" y="898962"/>
+                </a:lnTo>
+                <a:lnTo>
+                  <a:pt x="1897801" y="764311"/>
+                </a:lnTo>
+                <a:lnTo>
+                  <a:pt x="1887133" y="630836"/>
+                </a:lnTo>
+                <a:lnTo>
+                  <a:pt x="1871760" y="499210"/>
+                </a:lnTo>
+                <a:lnTo>
+                  <a:pt x="1851759" y="370096"/>
+                </a:lnTo>
+                <a:lnTo>
+                  <a:pt x="1851759" y="370096"/>
+                </a:lnTo>
+                <a:lnTo>
+                  <a:pt x="1840928" y="317865"/>
+                </a:lnTo>
+                <a:lnTo>
+                  <a:pt x="1827101" y="267978"/>
+                </a:lnTo>
+                <a:lnTo>
+                  <a:pt x="1810432" y="220990"/>
+                </a:lnTo>
+                <a:lnTo>
+                  <a:pt x="1791106" y="177425"/>
+                </a:lnTo>
+                <a:lnTo>
+                  <a:pt x="1769338" y="137765"/>
+                </a:lnTo>
+                <a:lnTo>
+                  <a:pt x="1745370" y="102453"/>
+                </a:lnTo>
+                <a:lnTo>
+                  <a:pt x="1719470" y="71882"/>
+                </a:lnTo>
+                <a:lnTo>
+                  <a:pt x="1691924" y="46392"/>
+                </a:lnTo>
+                <a:lnTo>
+                  <a:pt x="1663040" y="26266"/>
+                </a:lnTo>
+                <a:lnTo>
+                  <a:pt x="1633139" y="11728"/>
+                </a:lnTo>
+                <a:lnTo>
+                  <a:pt x="1602554" y="2940"/>
+                </a:lnTo>
+                <a:lnTo>
+                  <a:pt x="1571625" y="0"/>
+                </a:lnTo>
+                <a:lnTo>
+                  <a:pt x="1540695" y="2940"/>
+                </a:lnTo>
+                <a:lnTo>
+                  <a:pt x="1510110" y="11728"/>
+                </a:lnTo>
+                <a:lnTo>
+                  <a:pt x="1480209" y="26266"/>
+                </a:lnTo>
+                <a:lnTo>
+                  <a:pt x="1451325" y="46392"/>
+                </a:lnTo>
+                <a:lnTo>
+                  <a:pt x="1423779" y="71882"/>
+                </a:lnTo>
+                <a:lnTo>
+                  <a:pt x="1397879" y="102453"/>
+                </a:lnTo>
+                <a:lnTo>
+                  <a:pt x="1373911" y="137765"/>
+                </a:lnTo>
+                <a:lnTo>
+                  <a:pt x="1352143" y="177425"/>
+                </a:lnTo>
+                <a:lnTo>
+                  <a:pt x="1332817" y="220990"/>
+                </a:lnTo>
+                <a:lnTo>
+                  <a:pt x="1316148" y="267978"/>
+                </a:lnTo>
+                <a:lnTo>
+                  <a:pt x="1302321" y="317865"/>
+                </a:lnTo>
+                <a:lnTo>
+                  <a:pt x="1291490" y="370096"/>
+                </a:lnTo>
+                <a:lnTo>
+                  <a:pt x="1291490" y="370096"/>
+                </a:lnTo>
+                <a:lnTo>
+                  <a:pt x="1269800" y="511826"/>
+                </a:lnTo>
+                <a:lnTo>
+                  <a:pt x="1253686" y="656500"/>
+                </a:lnTo>
+                <a:lnTo>
+                  <a:pt x="1243244" y="803242"/>
+                </a:lnTo>
+                <a:lnTo>
+                  <a:pt x="1238538" y="951163"/>
+                </a:lnTo>
+                <a:lnTo>
+                  <a:pt x="1239597" y="1099368"/>
+                </a:lnTo>
+                <a:lnTo>
+                  <a:pt x="1246414" y="1246960"/>
+                </a:lnTo>
+                <a:lnTo>
+                  <a:pt x="1258947" y="1393045"/>
+                </a:lnTo>
+                <a:lnTo>
+                  <a:pt x="1277122" y="1536739"/>
+                </a:lnTo>
+                <a:lnTo>
+                  <a:pt x="1300827" y="1677172"/>
+                </a:lnTo>
+                <a:lnTo>
+                  <a:pt x="1329919" y="1813495"/>
+                </a:lnTo>
+                <a:lnTo>
+                  <a:pt x="1364223" y="1944880"/>
+                </a:lnTo>
+                <a:lnTo>
+                  <a:pt x="1403531" y="2070534"/>
+                </a:lnTo>
+                <a:lnTo>
+                  <a:pt x="1447604" y="2189696"/>
+                </a:lnTo>
+                <a:lnTo>
+                  <a:pt x="1496176" y="2301644"/>
+                </a:lnTo>
+                <a:lnTo>
+                  <a:pt x="1548953" y="2405700"/>
+                </a:lnTo>
+                <a:lnTo>
+                  <a:pt x="1605615" y="2501235"/>
+                </a:lnTo>
+                <a:lnTo>
+                  <a:pt x="1665819" y="2587670"/>
+                </a:lnTo>
+                <a:lnTo>
+                  <a:pt x="1729201" y="2664482"/>
+                </a:lnTo>
+                <a:lnTo>
+                  <a:pt x="1795377" y="2731206"/>
+                </a:lnTo>
+                <a:lnTo>
+                  <a:pt x="1863947" y="2787438"/>
+                </a:lnTo>
+                <a:lnTo>
+                  <a:pt x="1934495" y="2832838"/>
+                </a:lnTo>
+                <a:lnTo>
+                  <a:pt x="2006594" y="2867130"/>
+                </a:lnTo>
+                <a:lnTo>
+                  <a:pt x="2079809" y="2890108"/>
+                </a:lnTo>
+                <a:lnTo>
+                  <a:pt x="2153694" y="2901631"/>
+                </a:lnTo>
+                <a:lnTo>
+                  <a:pt x="2227805" y="2901631"/>
+                </a:lnTo>
+                <a:lnTo>
+                  <a:pt x="2301690" y="2890108"/>
+                </a:lnTo>
+                <a:lnTo>
+                  <a:pt x="2374905" y="2867130"/>
+                </a:lnTo>
+                <a:lnTo>
+                  <a:pt x="2447004" y="2832838"/>
+                </a:lnTo>
+                <a:lnTo>
+                  <a:pt x="2517552" y="2787438"/>
+                </a:lnTo>
+                <a:lnTo>
+                  <a:pt x="2586122" y="2731206"/>
+                </a:lnTo>
+                <a:lnTo>
+                  <a:pt x="2652298" y="2664482"/>
+                </a:lnTo>
+                <a:lnTo>
+                  <a:pt x="2715680" y="2587670"/>
+                </a:lnTo>
+                <a:lnTo>
+                  <a:pt x="2775884" y="2501235"/>
+                </a:lnTo>
+                <a:lnTo>
+                  <a:pt x="2832546" y="2405700"/>
+                </a:lnTo>
+                <a:lnTo>
+                  <a:pt x="2885323" y="2301644"/>
+                </a:lnTo>
+                <a:lnTo>
+                  <a:pt x="2933895" y="2189696"/>
+                </a:lnTo>
+                <a:lnTo>
+                  <a:pt x="2977968" y="2070534"/>
+                </a:lnTo>
+                <a:lnTo>
+                  <a:pt x="3017276" y="1944880"/>
+                </a:lnTo>
+                <a:lnTo>
+                  <a:pt x="3051580" y="1813495"/>
+                </a:lnTo>
+                <a:lnTo>
+                  <a:pt x="3080672" y="1677172"/>
+                </a:lnTo>
+                <a:lnTo>
+                  <a:pt x="3104377" y="1536739"/>
+                </a:lnTo>
+                <a:lnTo>
+                  <a:pt x="3122552" y="1393045"/>
+                </a:lnTo>
+                <a:lnTo>
+                  <a:pt x="3135085" y="1246960"/>
+                </a:lnTo>
+                <a:lnTo>
+                  <a:pt x="3141902" y="1099368"/>
+                </a:lnTo>
+                <a:lnTo>
+                  <a:pt x="3142961" y="951163"/>
+                </a:lnTo>
+                <a:lnTo>
+                  <a:pt x="3138255" y="803242"/>
+                </a:lnTo>
+                <a:lnTo>
+                  <a:pt x="3127813" y="656500"/>
+                </a:lnTo>
+                <a:lnTo>
+                  <a:pt x="3111699" y="511826"/>
+                </a:lnTo>
+                <a:lnTo>
+                  <a:pt x="3090009" y="370096"/>
+                </a:lnTo>
+                <a:lnTo>
+                  <a:pt x="3090009" y="370096"/>
+                </a:lnTo>
+                <a:lnTo>
+                  <a:pt x="3079178" y="317865"/>
+                </a:lnTo>
+                <a:lnTo>
+                  <a:pt x="3065351" y="267978"/>
+                </a:lnTo>
+                <a:lnTo>
+                  <a:pt x="3048682" y="220990"/>
+                </a:lnTo>
+                <a:lnTo>
+                  <a:pt x="3029356" y="177425"/>
+                </a:lnTo>
+                <a:lnTo>
+                  <a:pt x="3007588" y="137765"/>
+                </a:lnTo>
+                <a:lnTo>
+                  <a:pt x="2983620" y="102453"/>
+                </a:lnTo>
+                <a:lnTo>
+                  <a:pt x="2957720" y="71882"/>
+                </a:lnTo>
+                <a:lnTo>
+                  <a:pt x="2930174" y="46392"/>
+                </a:lnTo>
+                <a:lnTo>
+                  <a:pt x="2901290" y="26266"/>
+                </a:lnTo>
+                <a:lnTo>
+                  <a:pt x="2871389" y="11728"/>
+                </a:lnTo>
+                <a:lnTo>
+                  <a:pt x="2840804" y="2940"/>
+                </a:lnTo>
+                <a:lnTo>
+                  <a:pt x="2809875" y="0"/>
+                </a:lnTo>
+                <a:lnTo>
+                  <a:pt x="2778945" y="2940"/>
+                </a:lnTo>
+                <a:lnTo>
+                  <a:pt x="2748360" y="11728"/>
+                </a:lnTo>
+                <a:lnTo>
+                  <a:pt x="2718459" y="26266"/>
+                </a:lnTo>
+                <a:lnTo>
+                  <a:pt x="2689575" y="46392"/>
+                </a:lnTo>
+                <a:lnTo>
+                  <a:pt x="2662029" y="71882"/>
+                </a:lnTo>
+                <a:lnTo>
+                  <a:pt x="2636129" y="102453"/>
+                </a:lnTo>
+                <a:lnTo>
+                  <a:pt x="2612161" y="137765"/>
+                </a:lnTo>
+                <a:lnTo>
+                  <a:pt x="2590393" y="177425"/>
+                </a:lnTo>
+                <a:lnTo>
+                  <a:pt x="2571067" y="220990"/>
+                </a:lnTo>
+                <a:lnTo>
+                  <a:pt x="2554398" y="267978"/>
+                </a:lnTo>
+                <a:lnTo>
+                  <a:pt x="2540571" y="317865"/>
+                </a:lnTo>
+                <a:lnTo>
+                  <a:pt x="2529740" y="370096"/>
+                </a:lnTo>
+                <a:lnTo>
+                  <a:pt x="2529740" y="370096"/>
+                </a:lnTo>
+                <a:lnTo>
+                  <a:pt x="2508050" y="511826"/>
+                </a:lnTo>
+                <a:lnTo>
+                  <a:pt x="2491936" y="656500"/>
+                </a:lnTo>
+                <a:lnTo>
+                  <a:pt x="2481494" y="803242"/>
+                </a:lnTo>
+                <a:lnTo>
+                  <a:pt x="2476788" y="951163"/>
+                </a:lnTo>
+                <a:lnTo>
+                  <a:pt x="2477847" y="1099368"/>
+                </a:lnTo>
+                <a:lnTo>
+                  <a:pt x="2484664" y="1246960"/>
+                </a:lnTo>
+                <a:lnTo>
+                  <a:pt x="2497197" y="1393045"/>
+                </a:lnTo>
+                <a:lnTo>
+                  <a:pt x="2515372" y="1536739"/>
+                </a:lnTo>
+                <a:lnTo>
+                  <a:pt x="2539077" y="1677172"/>
+                </a:lnTo>
+                <a:lnTo>
+                  <a:pt x="2568169" y="1813495"/>
+                </a:lnTo>
+                <a:lnTo>
+                  <a:pt x="2602473" y="1944880"/>
+                </a:lnTo>
+                <a:lnTo>
+                  <a:pt x="2641781" y="2070534"/>
+                </a:lnTo>
+                <a:lnTo>
+                  <a:pt x="2685854" y="2189696"/>
+                </a:lnTo>
+                <a:lnTo>
+                  <a:pt x="2734426" y="2301644"/>
+                </a:lnTo>
+                <a:lnTo>
+                  <a:pt x="2787203" y="2405700"/>
+                </a:lnTo>
+                <a:lnTo>
+                  <a:pt x="2843865" y="2501235"/>
+                </a:lnTo>
+                <a:lnTo>
+                  <a:pt x="2904069" y="2587670"/>
+                </a:lnTo>
+                <a:lnTo>
+                  <a:pt x="2967451" y="2664482"/>
+                </a:lnTo>
+                <a:lnTo>
+                  <a:pt x="3033627" y="2731206"/>
+                </a:lnTo>
+                <a:lnTo>
+                  <a:pt x="3102197" y="2787438"/>
+                </a:lnTo>
+                <a:lnTo>
+                  <a:pt x="3172745" y="2832838"/>
+                </a:lnTo>
+                <a:lnTo>
+                  <a:pt x="3244844" y="2867130"/>
+                </a:lnTo>
+                <a:lnTo>
+                  <a:pt x="3318059" y="2890108"/>
+                </a:lnTo>
+                <a:lnTo>
+                  <a:pt x="3391944" y="2901631"/>
+                </a:lnTo>
+                <a:lnTo>
+                  <a:pt x="3466055" y="2901631"/>
+                </a:lnTo>
+                <a:lnTo>
+                  <a:pt x="3539940" y="2890108"/>
+                </a:lnTo>
+                <a:lnTo>
+                  <a:pt x="3613155" y="2867130"/>
+                </a:lnTo>
+                <a:lnTo>
+                  <a:pt x="3685254" y="2832838"/>
+                </a:lnTo>
+                <a:lnTo>
+                  <a:pt x="3755802" y="2787438"/>
+                </a:lnTo>
+                <a:lnTo>
+                  <a:pt x="3824372" y="2731206"/>
+                </a:lnTo>
+                <a:lnTo>
+                  <a:pt x="3890548" y="2664482"/>
+                </a:lnTo>
+                <a:lnTo>
+                  <a:pt x="3953930" y="2587670"/>
+                </a:lnTo>
+                <a:lnTo>
+                  <a:pt x="4014134" y="2501235"/>
+                </a:lnTo>
+                <a:lnTo>
+                  <a:pt x="4070796" y="2405700"/>
+                </a:lnTo>
+                <a:lnTo>
+                  <a:pt x="4123573" y="2301644"/>
+                </a:lnTo>
+                <a:lnTo>
+                  <a:pt x="4172145" y="2189696"/>
+                </a:lnTo>
+                <a:lnTo>
+                  <a:pt x="4216218" y="2070534"/>
+                </a:lnTo>
+                <a:lnTo>
+                  <a:pt x="4255526" y="1944880"/>
+                </a:lnTo>
+                <a:lnTo>
+                  <a:pt x="4289830" y="1813495"/>
+                </a:lnTo>
+                <a:lnTo>
+                  <a:pt x="4318922" y="1677172"/>
+                </a:lnTo>
+                <a:lnTo>
+                  <a:pt x="4342627" y="1536739"/>
+                </a:lnTo>
+                <a:lnTo>
+                  <a:pt x="4360802" y="1393045"/>
+                </a:lnTo>
+                <a:lnTo>
+                  <a:pt x="4373335" y="1246960"/>
+                </a:lnTo>
+                <a:lnTo>
+                  <a:pt x="4380152" y="1099368"/>
+                </a:lnTo>
+                <a:lnTo>
+                  <a:pt x="4381211" y="951163"/>
+                </a:lnTo>
+                <a:lnTo>
+                  <a:pt x="4376505" y="803242"/>
+                </a:lnTo>
+                <a:lnTo>
+                  <a:pt x="4366063" y="656500"/>
+                </a:lnTo>
+                <a:lnTo>
+                  <a:pt x="4349949" y="511826"/>
+                </a:lnTo>
+                <a:lnTo>
+                  <a:pt x="4328259" y="370096"/>
+                </a:lnTo>
+                <a:lnTo>
+                  <a:pt x="4328259" y="370096"/>
+                </a:lnTo>
+                <a:lnTo>
+                  <a:pt x="4317428" y="317865"/>
+                </a:lnTo>
+                <a:lnTo>
+                  <a:pt x="4303601" y="267978"/>
+                </a:lnTo>
+                <a:lnTo>
+                  <a:pt x="4286932" y="220990"/>
+                </a:lnTo>
+                <a:lnTo>
+                  <a:pt x="4267606" y="177425"/>
+                </a:lnTo>
+                <a:lnTo>
+                  <a:pt x="4245838" y="137765"/>
+                </a:lnTo>
+                <a:lnTo>
+                  <a:pt x="4221870" y="102453"/>
+                </a:lnTo>
+                <a:lnTo>
+                  <a:pt x="4195970" y="71882"/>
+                </a:lnTo>
+                <a:lnTo>
+                  <a:pt x="4168424" y="46392"/>
+                </a:lnTo>
+                <a:lnTo>
+                  <a:pt x="4139540" y="26266"/>
+                </a:lnTo>
+                <a:lnTo>
+                  <a:pt x="4109639" y="11728"/>
+                </a:lnTo>
+                <a:lnTo>
+                  <a:pt x="4079054" y="2940"/>
+                </a:lnTo>
+                <a:lnTo>
+                  <a:pt x="4048125" y="0"/>
+                </a:lnTo>
+                <a:lnTo>
+                  <a:pt x="4017195" y="2940"/>
+                </a:lnTo>
+                <a:lnTo>
+                  <a:pt x="3986610" y="11728"/>
+                </a:lnTo>
+                <a:lnTo>
+                  <a:pt x="3956709" y="26266"/>
+                </a:lnTo>
+                <a:lnTo>
+                  <a:pt x="3927825" y="46392"/>
+                </a:lnTo>
+                <a:lnTo>
+                  <a:pt x="3900279" y="71882"/>
+                </a:lnTo>
+                <a:lnTo>
+                  <a:pt x="3874379" y="102453"/>
+                </a:lnTo>
+                <a:lnTo>
+                  <a:pt x="3850411" y="137765"/>
+                </a:lnTo>
+                <a:lnTo>
+                  <a:pt x="3828643" y="177425"/>
+                </a:lnTo>
+                <a:lnTo>
+                  <a:pt x="3809317" y="220990"/>
+                </a:lnTo>
+                <a:lnTo>
+                  <a:pt x="3792648" y="267978"/>
+                </a:lnTo>
+                <a:lnTo>
+                  <a:pt x="3778821" y="317865"/>
+                </a:lnTo>
+                <a:lnTo>
+                  <a:pt x="3767990" y="370096"/>
+                </a:lnTo>
+                <a:lnTo>
+                  <a:pt x="3767990" y="370096"/>
+                </a:lnTo>
+                <a:lnTo>
+                  <a:pt x="3746300" y="511826"/>
+                </a:lnTo>
+                <a:lnTo>
+                  <a:pt x="3730186" y="656500"/>
+                </a:lnTo>
+                <a:lnTo>
+                  <a:pt x="3719744" y="803242"/>
+                </a:lnTo>
+                <a:lnTo>
+                  <a:pt x="3715038" y="951163"/>
+                </a:lnTo>
+                <a:lnTo>
+                  <a:pt x="3716097" y="1099368"/>
+                </a:lnTo>
+                <a:lnTo>
+                  <a:pt x="3722914" y="1246960"/>
+                </a:lnTo>
+                <a:lnTo>
+                  <a:pt x="3735447" y="1393045"/>
+                </a:lnTo>
+                <a:lnTo>
+                  <a:pt x="3753622" y="1536739"/>
+                </a:lnTo>
+                <a:lnTo>
+                  <a:pt x="3777327" y="1677172"/>
+                </a:lnTo>
+                <a:lnTo>
+                  <a:pt x="3806419" y="1813495"/>
+                </a:lnTo>
+                <a:lnTo>
+                  <a:pt x="3840723" y="1944880"/>
+                </a:lnTo>
+                <a:lnTo>
+                  <a:pt x="3880031" y="2070534"/>
+                </a:lnTo>
+                <a:lnTo>
+                  <a:pt x="3924104" y="2189696"/>
+                </a:lnTo>
+                <a:lnTo>
+                  <a:pt x="3972676" y="2301644"/>
+                </a:lnTo>
+                <a:lnTo>
+                  <a:pt x="4025453" y="2405700"/>
+                </a:lnTo>
+                <a:lnTo>
+                  <a:pt x="4082115" y="2501235"/>
+                </a:lnTo>
+                <a:lnTo>
+                  <a:pt x="4142319" y="2587670"/>
+                </a:lnTo>
+                <a:lnTo>
+                  <a:pt x="4205701" y="2664482"/>
+                </a:lnTo>
+                <a:lnTo>
+                  <a:pt x="4271877" y="2731206"/>
+                </a:lnTo>
+                <a:lnTo>
+                  <a:pt x="4340447" y="2787438"/>
+                </a:lnTo>
+                <a:lnTo>
+                  <a:pt x="4410995" y="2832838"/>
+                </a:lnTo>
+                <a:lnTo>
+                  <a:pt x="4483094" y="2867130"/>
+                </a:lnTo>
+                <a:lnTo>
+                  <a:pt x="4556309" y="2890108"/>
+                </a:lnTo>
+                <a:lnTo>
+                  <a:pt x="4630194" y="2901631"/>
+                </a:lnTo>
+                <a:lnTo>
+                  <a:pt x="4704305" y="2901631"/>
+                </a:lnTo>
+                <a:lnTo>
+                  <a:pt x="4778190" y="2890108"/>
+                </a:lnTo>
+                <a:lnTo>
+                  <a:pt x="4851405" y="2867130"/>
+                </a:lnTo>
+                <a:lnTo>
+                  <a:pt x="4923504" y="2832838"/>
+                </a:lnTo>
+                <a:lnTo>
+                  <a:pt x="4994052" y="2787438"/>
+                </a:lnTo>
+                <a:lnTo>
+                  <a:pt x="5062622" y="2731206"/>
+                </a:lnTo>
+                <a:lnTo>
+                  <a:pt x="5128798" y="2664482"/>
+                </a:lnTo>
+                <a:lnTo>
+                  <a:pt x="5192180" y="2587670"/>
+                </a:lnTo>
+                <a:lnTo>
+                  <a:pt x="5252384" y="2501235"/>
+                </a:lnTo>
+                <a:lnTo>
+                  <a:pt x="5309046" y="2405700"/>
+                </a:lnTo>
+                <a:lnTo>
+                  <a:pt x="5361823" y="2301644"/>
+                </a:lnTo>
+                <a:lnTo>
+                  <a:pt x="5410395" y="2189696"/>
+                </a:lnTo>
+                <a:lnTo>
+                  <a:pt x="5454468" y="2070534"/>
+                </a:lnTo>
+                <a:lnTo>
+                  <a:pt x="5493776" y="1944880"/>
+                </a:lnTo>
+                <a:lnTo>
+                  <a:pt x="5528080" y="1813495"/>
+                </a:lnTo>
+                <a:lnTo>
+                  <a:pt x="5557172" y="1677172"/>
+                </a:lnTo>
+                <a:lnTo>
+                  <a:pt x="5580877" y="1536739"/>
+                </a:lnTo>
+                <a:lnTo>
+                  <a:pt x="5599052" y="1393045"/>
+                </a:lnTo>
+                <a:lnTo>
+                  <a:pt x="5611585" y="1246960"/>
+                </a:lnTo>
+                <a:lnTo>
+                  <a:pt x="5618402" y="1099368"/>
+                </a:lnTo>
+                <a:lnTo>
+                  <a:pt x="5619461" y="951163"/>
+                </a:lnTo>
+                <a:lnTo>
+                  <a:pt x="5614755" y="803242"/>
+                </a:lnTo>
+                <a:lnTo>
+                  <a:pt x="5604313" y="656500"/>
+                </a:lnTo>
+                <a:lnTo>
+                  <a:pt x="5588199" y="511826"/>
+                </a:lnTo>
+                <a:lnTo>
+                  <a:pt x="5566509" y="370096"/>
+                </a:lnTo>
+                <a:lnTo>
+                  <a:pt x="5566509" y="370096"/>
+                </a:lnTo>
+                <a:lnTo>
+                  <a:pt x="5555678" y="317865"/>
+                </a:lnTo>
+                <a:lnTo>
+                  <a:pt x="5541851" y="267978"/>
+                </a:lnTo>
+                <a:lnTo>
+                  <a:pt x="5525182" y="220990"/>
+                </a:lnTo>
+                <a:lnTo>
+                  <a:pt x="5505856" y="177425"/>
+                </a:lnTo>
+                <a:lnTo>
+                  <a:pt x="5484088" y="137765"/>
+                </a:lnTo>
+                <a:lnTo>
+                  <a:pt x="5460120" y="102453"/>
+                </a:lnTo>
+                <a:lnTo>
+                  <a:pt x="5434220" y="71882"/>
+                </a:lnTo>
+                <a:lnTo>
+                  <a:pt x="5406674" y="46392"/>
+                </a:lnTo>
+                <a:lnTo>
+                  <a:pt x="5377790" y="26266"/>
+                </a:lnTo>
+                <a:lnTo>
+                  <a:pt x="5347889" y="11728"/>
+                </a:lnTo>
+                <a:lnTo>
+                  <a:pt x="5317304" y="2940"/>
+                </a:lnTo>
+                <a:lnTo>
+                  <a:pt x="5286375" y="0"/>
+                </a:lnTo>
+                <a:lnTo>
+                  <a:pt x="5255445" y="2940"/>
+                </a:lnTo>
+                <a:lnTo>
+                  <a:pt x="5224860" y="11728"/>
+                </a:lnTo>
+                <a:lnTo>
+                  <a:pt x="5194959" y="26266"/>
+                </a:lnTo>
+                <a:lnTo>
+                  <a:pt x="5166075" y="46392"/>
+                </a:lnTo>
+                <a:lnTo>
+                  <a:pt x="5138529" y="71882"/>
+                </a:lnTo>
+                <a:lnTo>
+                  <a:pt x="5112629" y="102453"/>
+                </a:lnTo>
+                <a:lnTo>
+                  <a:pt x="5088661" y="137765"/>
+                </a:lnTo>
+                <a:lnTo>
+                  <a:pt x="5066893" y="177425"/>
+                </a:lnTo>
+                <a:lnTo>
+                  <a:pt x="5047567" y="220990"/>
+                </a:lnTo>
+                <a:lnTo>
+                  <a:pt x="5030898" y="267978"/>
+                </a:lnTo>
+                <a:lnTo>
+                  <a:pt x="5017071" y="317865"/>
+                </a:lnTo>
+                <a:lnTo>
+                  <a:pt x="5006240" y="370096"/>
+                </a:lnTo>
+                <a:lnTo>
+                  <a:pt x="5006240" y="370096"/>
+                </a:lnTo>
+                <a:lnTo>
+                  <a:pt x="4986239" y="499210"/>
+                </a:lnTo>
+                <a:lnTo>
+                  <a:pt x="4970866" y="630836"/>
+                </a:lnTo>
+                <a:lnTo>
+                  <a:pt x="4960198" y="764311"/>
+                </a:lnTo>
+                <a:lnTo>
+                  <a:pt x="4954289" y="898962"/>
+                </a:lnTo>
+                <a:lnTo>
+                  <a:pt x="4953170" y="1034113"/>
+                </a:lnTo>
+                <a:lnTo>
+                  <a:pt x="4956845" y="1169082"/>
+                </a:lnTo>
+                <a:lnTo>
+                  <a:pt x="4965296" y="1303190"/>
+                </a:lnTo>
+                <a:lnTo>
+                  <a:pt x="4978481" y="1435762"/>
+                </a:lnTo>
+                <a:lnTo>
+                  <a:pt x="4996333" y="1566131"/>
+                </a:lnTo>
+                <a:lnTo>
+                  <a:pt x="5018762" y="1693640"/>
+                </a:lnTo>
+                <a:lnTo>
+                  <a:pt x="5045656" y="1817646"/>
+                </a:lnTo>
+                <a:lnTo>
+                  <a:pt x="5076878" y="1937527"/>
+                </a:lnTo>
+                <a:lnTo>
+                  <a:pt x="5112273" y="2052677"/>
+                </a:lnTo>
+                <a:lnTo>
+                  <a:pt x="5151661" y="2162518"/>
+                </a:lnTo>
+                <a:lnTo>
+                  <a:pt x="5194844" y="2266497"/>
+                </a:lnTo>
+                <a:lnTo>
+                  <a:pt x="5241605" y="2364090"/>
+                </a:lnTo>
+                <a:lnTo>
+                  <a:pt x="5291708" y="2454805"/>
+                </a:lnTo>
+                <a:lnTo>
+                  <a:pt x="5344902" y="2538186"/>
+                </a:lnTo>
+                <a:lnTo>
+                  <a:pt x="5400918" y="2613813"/>
+                </a:lnTo>
+                <a:lnTo>
+                  <a:pt x="5459475" y="2681306"/>
+                </a:lnTo>
+                <a:lnTo>
+                  <a:pt x="5520277" y="2740324"/>
+                </a:lnTo>
+                <a:lnTo>
+                  <a:pt x="5583018" y="2790571"/>
+                </a:lnTo>
+                <a:lnTo>
+                  <a:pt x="5647383" y="2831793"/>
+                </a:lnTo>
+                <a:lnTo>
+                  <a:pt x="5713048" y="2863783"/>
+                </a:lnTo>
+                <a:lnTo>
+                  <a:pt x="5779681" y="2886381"/>
+                </a:lnTo>
+                <a:lnTo>
+                  <a:pt x="5846948" y="2899471"/>
+                </a:lnTo>
+                <a:lnTo>
+                  <a:pt x="5914510" y="2902988"/>
+                </a:lnTo>
+                <a:lnTo>
+                  <a:pt x="5982026" y="2896915"/>
+                </a:lnTo>
+                <a:lnTo>
+                  <a:pt x="6049157" y="2881282"/>
+                </a:lnTo>
+                <a:lnTo>
+                  <a:pt x="6115565" y="2856168"/>
+                </a:lnTo>
+                <a:lnTo>
+                  <a:pt x="6180915" y="2821699"/>
+                </a:lnTo>
+                <a:lnTo>
+                  <a:pt x="6244879" y="2778049"/>
+                </a:lnTo>
+                <a:lnTo>
+                  <a:pt x="6307134" y="2725437"/>
+                </a:lnTo>
+                <a:lnTo>
+                  <a:pt x="6367367" y="2664129"/>
+                </a:lnTo>
+                <a:lnTo>
+                  <a:pt x="6425274" y="2594432"/>
+                </a:lnTo>
+                <a:lnTo>
+                  <a:pt x="6480565" y="2516699"/>
+                </a:lnTo>
+                <a:lnTo>
+                  <a:pt x="6532960" y="2431320"/>
+                </a:lnTo>
+                <a:lnTo>
+                  <a:pt x="6582197" y="2338725"/>
+                </a:lnTo>
+                <a:lnTo>
+                  <a:pt x="6628026" y="2239381"/>
+                </a:lnTo>
+                <a:lnTo>
+                  <a:pt x="6670218" y="2133787"/>
+                </a:lnTo>
+                <a:lnTo>
+                  <a:pt x="6708560" y="2022475"/>
+                </a:lnTo>
+                <a:lnTo>
+                  <a:pt x="6742859" y="1906006"/>
+                </a:lnTo>
+                <a:lnTo>
+                  <a:pt x="6772942" y="1784966"/>
+                </a:lnTo>
+                <a:lnTo>
+                  <a:pt x="6798658" y="1659964"/>
+                </a:lnTo>
+                <a:lnTo>
+                  <a:pt x="6819877" y="1531629"/>
+                </a:lnTo>
+                <a:lnTo>
+                  <a:pt x="6836492" y="1400609"/>
+                </a:lnTo>
+                <a:lnTo>
+                  <a:pt x="6848421" y="1267561"/>
+                </a:lnTo>
+                <a:lnTo>
+                  <a:pt x="6855602" y="1133157"/>
+                </a:lnTo>
+                <a:lnTo>
+                  <a:pt x="6858000" y="998073"/>
                 </a:lnTo>
               </a:path>
             </a:pathLst>
@@ -3512,6 +4250,831 @@
           <a:lstStyle/>
           <a:p>
             <a:pPr algn="ctr"/>
+            <a:endParaRPr/>
+          </a:p>
+        </p:txBody>
+      </p:sp>
+      <p:sp>
+        <p:nvSpPr>
+          <p:cNvPr id="3" name="Freeform 2"/>
+          <p:cNvSpPr/>
+          <p:nvPr/>
+        </p:nvSpPr>
+        <p:spPr>
+          <a:xfrm>
+            <a:off x="2305705" y="1714086"/>
+            <a:ext cx="568600" cy="568671"/>
+          </a:xfrm>
+          <a:custGeom>
+            <a:avLst/>
+            <a:gdLst/>
+            <a:ahLst/>
+            <a:cxnLst/>
+            <a:rect l="l" t="t" r="r" b="b"/>
+            <a:pathLst>
+              <a:path w="568600" h="568671">
+                <a:moveTo>
+                  <a:pt x="568600" y="284335"/>
+                </a:moveTo>
+                <a:lnTo>
+                  <a:pt x="568028" y="302371"/>
+                </a:lnTo>
+                <a:lnTo>
+                  <a:pt x="566312" y="320335"/>
+                </a:lnTo>
+                <a:lnTo>
+                  <a:pt x="563461" y="338153"/>
+                </a:lnTo>
+                <a:lnTo>
+                  <a:pt x="559486" y="355755"/>
+                </a:lnTo>
+                <a:lnTo>
+                  <a:pt x="554402" y="373069"/>
+                </a:lnTo>
+                <a:lnTo>
+                  <a:pt x="548230" y="390026"/>
+                </a:lnTo>
+                <a:lnTo>
+                  <a:pt x="540995" y="406557"/>
+                </a:lnTo>
+                <a:lnTo>
+                  <a:pt x="532726" y="422596"/>
+                </a:lnTo>
+                <a:lnTo>
+                  <a:pt x="523457" y="438078"/>
+                </a:lnTo>
+                <a:lnTo>
+                  <a:pt x="513224" y="452942"/>
+                </a:lnTo>
+                <a:lnTo>
+                  <a:pt x="502070" y="467126"/>
+                </a:lnTo>
+                <a:lnTo>
+                  <a:pt x="490038" y="480574"/>
+                </a:lnTo>
+                <a:lnTo>
+                  <a:pt x="477177" y="493232"/>
+                </a:lnTo>
+                <a:lnTo>
+                  <a:pt x="463540" y="505049"/>
+                </a:lnTo>
+                <a:lnTo>
+                  <a:pt x="449180" y="515978"/>
+                </a:lnTo>
+                <a:lnTo>
+                  <a:pt x="434156" y="525973"/>
+                </a:lnTo>
+                <a:lnTo>
+                  <a:pt x="418529" y="534996"/>
+                </a:lnTo>
+                <a:lnTo>
+                  <a:pt x="402361" y="543009"/>
+                </a:lnTo>
+                <a:lnTo>
+                  <a:pt x="385717" y="549981"/>
+                </a:lnTo>
+                <a:lnTo>
+                  <a:pt x="368664" y="555883"/>
+                </a:lnTo>
+                <a:lnTo>
+                  <a:pt x="351272" y="560691"/>
+                </a:lnTo>
+                <a:lnTo>
+                  <a:pt x="333609" y="564387"/>
+                </a:lnTo>
+                <a:lnTo>
+                  <a:pt x="315748" y="566955"/>
+                </a:lnTo>
+                <a:lnTo>
+                  <a:pt x="297759" y="568385"/>
+                </a:lnTo>
+                <a:lnTo>
+                  <a:pt x="279717" y="568671"/>
+                </a:lnTo>
+                <a:lnTo>
+                  <a:pt x="261692" y="567813"/>
+                </a:lnTo>
+                <a:lnTo>
+                  <a:pt x="243758" y="565813"/>
+                </a:lnTo>
+                <a:lnTo>
+                  <a:pt x="225987" y="562679"/>
+                </a:lnTo>
+                <a:lnTo>
+                  <a:pt x="208451" y="558425"/>
+                </a:lnTo>
+                <a:lnTo>
+                  <a:pt x="191220" y="553067"/>
+                </a:lnTo>
+                <a:lnTo>
+                  <a:pt x="174363" y="546627"/>
+                </a:lnTo>
+                <a:lnTo>
+                  <a:pt x="157949" y="539131"/>
+                </a:lnTo>
+                <a:lnTo>
+                  <a:pt x="142043" y="530608"/>
+                </a:lnTo>
+                <a:lnTo>
+                  <a:pt x="126709" y="521095"/>
+                </a:lnTo>
+                <a:lnTo>
+                  <a:pt x="112010" y="510628"/>
+                </a:lnTo>
+                <a:lnTo>
+                  <a:pt x="98005" y="499249"/>
+                </a:lnTo>
+                <a:lnTo>
+                  <a:pt x="84749" y="487005"/>
+                </a:lnTo>
+                <a:lnTo>
+                  <a:pt x="72296" y="473946"/>
+                </a:lnTo>
+                <a:lnTo>
+                  <a:pt x="60697" y="460122"/>
+                </a:lnTo>
+                <a:lnTo>
+                  <a:pt x="49998" y="445591"/>
+                </a:lnTo>
+                <a:lnTo>
+                  <a:pt x="40242" y="430411"/>
+                </a:lnTo>
+                <a:lnTo>
+                  <a:pt x="31469" y="414642"/>
+                </a:lnTo>
+                <a:lnTo>
+                  <a:pt x="23713" y="398349"/>
+                </a:lnTo>
+                <a:lnTo>
+                  <a:pt x="17007" y="381596"/>
+                </a:lnTo>
+                <a:lnTo>
+                  <a:pt x="11376" y="364452"/>
+                </a:lnTo>
+                <a:lnTo>
+                  <a:pt x="6844" y="346986"/>
+                </a:lnTo>
+                <a:lnTo>
+                  <a:pt x="3429" y="329267"/>
+                </a:lnTo>
+                <a:lnTo>
+                  <a:pt x="1145" y="311367"/>
+                </a:lnTo>
+                <a:lnTo>
+                  <a:pt x="0" y="293358"/>
+                </a:lnTo>
+                <a:lnTo>
+                  <a:pt x="0" y="275313"/>
+                </a:lnTo>
+                <a:lnTo>
+                  <a:pt x="1145" y="257304"/>
+                </a:lnTo>
+                <a:lnTo>
+                  <a:pt x="3429" y="239404"/>
+                </a:lnTo>
+                <a:lnTo>
+                  <a:pt x="6844" y="221685"/>
+                </a:lnTo>
+                <a:lnTo>
+                  <a:pt x="11376" y="204219"/>
+                </a:lnTo>
+                <a:lnTo>
+                  <a:pt x="17007" y="187075"/>
+                </a:lnTo>
+                <a:lnTo>
+                  <a:pt x="23713" y="170322"/>
+                </a:lnTo>
+                <a:lnTo>
+                  <a:pt x="31469" y="154029"/>
+                </a:lnTo>
+                <a:lnTo>
+                  <a:pt x="40242" y="138260"/>
+                </a:lnTo>
+                <a:lnTo>
+                  <a:pt x="49998" y="123080"/>
+                </a:lnTo>
+                <a:lnTo>
+                  <a:pt x="60697" y="108549"/>
+                </a:lnTo>
+                <a:lnTo>
+                  <a:pt x="72296" y="94725"/>
+                </a:lnTo>
+                <a:lnTo>
+                  <a:pt x="84749" y="81666"/>
+                </a:lnTo>
+                <a:lnTo>
+                  <a:pt x="98005" y="69422"/>
+                </a:lnTo>
+                <a:lnTo>
+                  <a:pt x="112010" y="58043"/>
+                </a:lnTo>
+                <a:lnTo>
+                  <a:pt x="126709" y="47576"/>
+                </a:lnTo>
+                <a:lnTo>
+                  <a:pt x="142043" y="38062"/>
+                </a:lnTo>
+                <a:lnTo>
+                  <a:pt x="157949" y="29540"/>
+                </a:lnTo>
+                <a:lnTo>
+                  <a:pt x="174363" y="22044"/>
+                </a:lnTo>
+                <a:lnTo>
+                  <a:pt x="191220" y="15604"/>
+                </a:lnTo>
+                <a:lnTo>
+                  <a:pt x="208451" y="10246"/>
+                </a:lnTo>
+                <a:lnTo>
+                  <a:pt x="225987" y="5992"/>
+                </a:lnTo>
+                <a:lnTo>
+                  <a:pt x="243758" y="2858"/>
+                </a:lnTo>
+                <a:lnTo>
+                  <a:pt x="261692" y="858"/>
+                </a:lnTo>
+                <a:lnTo>
+                  <a:pt x="279717" y="0"/>
+                </a:lnTo>
+                <a:lnTo>
+                  <a:pt x="297759" y="286"/>
+                </a:lnTo>
+                <a:lnTo>
+                  <a:pt x="315748" y="1716"/>
+                </a:lnTo>
+                <a:lnTo>
+                  <a:pt x="333609" y="4284"/>
+                </a:lnTo>
+                <a:lnTo>
+                  <a:pt x="351272" y="7980"/>
+                </a:lnTo>
+                <a:lnTo>
+                  <a:pt x="368664" y="12788"/>
+                </a:lnTo>
+                <a:lnTo>
+                  <a:pt x="385717" y="18690"/>
+                </a:lnTo>
+                <a:lnTo>
+                  <a:pt x="402361" y="25662"/>
+                </a:lnTo>
+                <a:lnTo>
+                  <a:pt x="418529" y="33675"/>
+                </a:lnTo>
+                <a:lnTo>
+                  <a:pt x="434156" y="42698"/>
+                </a:lnTo>
+                <a:lnTo>
+                  <a:pt x="449180" y="52693"/>
+                </a:lnTo>
+                <a:lnTo>
+                  <a:pt x="463540" y="63622"/>
+                </a:lnTo>
+                <a:lnTo>
+                  <a:pt x="477177" y="75438"/>
+                </a:lnTo>
+                <a:lnTo>
+                  <a:pt x="490038" y="88097"/>
+                </a:lnTo>
+                <a:lnTo>
+                  <a:pt x="502070" y="101545"/>
+                </a:lnTo>
+                <a:lnTo>
+                  <a:pt x="513224" y="115729"/>
+                </a:lnTo>
+                <a:lnTo>
+                  <a:pt x="523457" y="130593"/>
+                </a:lnTo>
+                <a:lnTo>
+                  <a:pt x="532726" y="146075"/>
+                </a:lnTo>
+                <a:lnTo>
+                  <a:pt x="540995" y="162114"/>
+                </a:lnTo>
+                <a:lnTo>
+                  <a:pt x="548230" y="178645"/>
+                </a:lnTo>
+                <a:lnTo>
+                  <a:pt x="554402" y="195602"/>
+                </a:lnTo>
+                <a:lnTo>
+                  <a:pt x="559486" y="212916"/>
+                </a:lnTo>
+                <a:lnTo>
+                  <a:pt x="563461" y="230518"/>
+                </a:lnTo>
+                <a:lnTo>
+                  <a:pt x="566312" y="248336"/>
+                </a:lnTo>
+                <a:lnTo>
+                  <a:pt x="568028" y="266300"/>
+                </a:lnTo>
+                <a:lnTo>
+                  <a:pt x="568600" y="284335"/>
+                </a:lnTo>
+              </a:path>
+            </a:pathLst>
+          </a:custGeom>
+          <a:noFill/>
+          <a:ln w="9144">
+            <a:solidFill>
+              <a:srgbClr val="FFD700"/>
+            </a:solidFill>
+          </a:ln>
+          <a:effectLst/>
+        </p:spPr>
+        <p:style>
+          <a:lnRef idx="1">
+            <a:schemeClr val="accent1"/>
+          </a:lnRef>
+          <a:fillRef idx="3">
+            <a:schemeClr val="accent1"/>
+          </a:fillRef>
+          <a:effectRef idx="2">
+            <a:schemeClr val="accent1"/>
+          </a:effectRef>
+          <a:fontRef idx="minor">
+            <a:schemeClr val="lt1"/>
+          </a:fontRef>
+        </p:style>
+        <p:txBody>
+          <a:bodyPr rtlCol="0" anchor="ctr"/>
+          <a:lstStyle/>
+          <a:p>
+            <a:pPr algn="ctr"/>
+            <a:endParaRPr/>
+          </a:p>
+        </p:txBody>
+      </p:sp>
+      <p:sp>
+        <p:nvSpPr>
+          <p:cNvPr id="4" name="Freeform 3"/>
+          <p:cNvSpPr/>
+          <p:nvPr/>
+        </p:nvSpPr>
+        <p:spPr>
+          <a:xfrm>
+            <a:off x="3534617" y="1584075"/>
+            <a:ext cx="587133" cy="1056973"/>
+          </a:xfrm>
+          <a:custGeom>
+            <a:avLst/>
+            <a:gdLst/>
+            <a:ahLst/>
+            <a:cxnLst/>
+            <a:rect l="l" t="t" r="r" b="b"/>
+            <a:pathLst>
+              <a:path w="587133" h="1056973">
+                <a:moveTo>
+                  <a:pt x="587133" y="528486"/>
+                </a:moveTo>
+                <a:lnTo>
+                  <a:pt x="586542" y="562009"/>
+                </a:lnTo>
+                <a:lnTo>
+                  <a:pt x="584771" y="595397"/>
+                </a:lnTo>
+                <a:lnTo>
+                  <a:pt x="581827" y="628516"/>
+                </a:lnTo>
+                <a:lnTo>
+                  <a:pt x="577721" y="661232"/>
+                </a:lnTo>
+                <a:lnTo>
+                  <a:pt x="572472" y="693413"/>
+                </a:lnTo>
+                <a:lnTo>
+                  <a:pt x="566099" y="724930"/>
+                </a:lnTo>
+                <a:lnTo>
+                  <a:pt x="558628" y="755656"/>
+                </a:lnTo>
+                <a:lnTo>
+                  <a:pt x="550090" y="785467"/>
+                </a:lnTo>
+                <a:lnTo>
+                  <a:pt x="540519" y="814244"/>
+                </a:lnTo>
+                <a:lnTo>
+                  <a:pt x="529953" y="841870"/>
+                </a:lnTo>
+                <a:lnTo>
+                  <a:pt x="518434" y="868234"/>
+                </a:lnTo>
+                <a:lnTo>
+                  <a:pt x="506010" y="893230"/>
+                </a:lnTo>
+                <a:lnTo>
+                  <a:pt x="492730" y="916757"/>
+                </a:lnTo>
+                <a:lnTo>
+                  <a:pt x="478648" y="938721"/>
+                </a:lnTo>
+                <a:lnTo>
+                  <a:pt x="463821" y="959033"/>
+                </a:lnTo>
+                <a:lnTo>
+                  <a:pt x="448307" y="977611"/>
+                </a:lnTo>
+                <a:lnTo>
+                  <a:pt x="432170" y="994381"/>
+                </a:lnTo>
+                <a:lnTo>
+                  <a:pt x="415475" y="1009275"/>
+                </a:lnTo>
+                <a:lnTo>
+                  <a:pt x="398289" y="1022233"/>
+                </a:lnTo>
+                <a:lnTo>
+                  <a:pt x="380680" y="1033203"/>
+                </a:lnTo>
+                <a:lnTo>
+                  <a:pt x="362721" y="1042140"/>
+                </a:lnTo>
+                <a:lnTo>
+                  <a:pt x="344483" y="1049010"/>
+                </a:lnTo>
+                <a:lnTo>
+                  <a:pt x="326039" y="1053783"/>
+                </a:lnTo>
+                <a:lnTo>
+                  <a:pt x="307464" y="1056441"/>
+                </a:lnTo>
+                <a:lnTo>
+                  <a:pt x="288834" y="1056973"/>
+                </a:lnTo>
+                <a:lnTo>
+                  <a:pt x="270221" y="1055377"/>
+                </a:lnTo>
+                <a:lnTo>
+                  <a:pt x="251703" y="1051660"/>
+                </a:lnTo>
+                <a:lnTo>
+                  <a:pt x="233353" y="1045835"/>
+                </a:lnTo>
+                <a:lnTo>
+                  <a:pt x="215245" y="1037928"/>
+                </a:lnTo>
+                <a:lnTo>
+                  <a:pt x="197452" y="1027969"/>
+                </a:lnTo>
+                <a:lnTo>
+                  <a:pt x="180046" y="1016000"/>
+                </a:lnTo>
+                <a:lnTo>
+                  <a:pt x="163097" y="1002067"/>
+                </a:lnTo>
+                <a:lnTo>
+                  <a:pt x="146672" y="986227"/>
+                </a:lnTo>
+                <a:lnTo>
+                  <a:pt x="130839" y="968544"/>
+                </a:lnTo>
+                <a:lnTo>
+                  <a:pt x="115661" y="949089"/>
+                </a:lnTo>
+                <a:lnTo>
+                  <a:pt x="101199" y="927940"/>
+                </a:lnTo>
+                <a:lnTo>
+                  <a:pt x="87511" y="905183"/>
+                </a:lnTo>
+                <a:lnTo>
+                  <a:pt x="74653" y="880909"/>
+                </a:lnTo>
+                <a:lnTo>
+                  <a:pt x="62675" y="855216"/>
+                </a:lnTo>
+                <a:lnTo>
+                  <a:pt x="51628" y="828208"/>
+                </a:lnTo>
+                <a:lnTo>
+                  <a:pt x="41554" y="799992"/>
+                </a:lnTo>
+                <a:lnTo>
+                  <a:pt x="32494" y="770683"/>
+                </a:lnTo>
+                <a:lnTo>
+                  <a:pt x="24486" y="740400"/>
+                </a:lnTo>
+                <a:lnTo>
+                  <a:pt x="17561" y="709262"/>
+                </a:lnTo>
+                <a:lnTo>
+                  <a:pt x="11746" y="677397"/>
+                </a:lnTo>
+                <a:lnTo>
+                  <a:pt x="7067" y="644932"/>
+                </a:lnTo>
+                <a:lnTo>
+                  <a:pt x="3540" y="611999"/>
+                </a:lnTo>
+                <a:lnTo>
+                  <a:pt x="1182" y="578729"/>
+                </a:lnTo>
+                <a:lnTo>
+                  <a:pt x="0" y="545256"/>
+                </a:lnTo>
+                <a:lnTo>
+                  <a:pt x="0" y="511717"/>
+                </a:lnTo>
+                <a:lnTo>
+                  <a:pt x="1182" y="478244"/>
+                </a:lnTo>
+                <a:lnTo>
+                  <a:pt x="3540" y="444974"/>
+                </a:lnTo>
+                <a:lnTo>
+                  <a:pt x="7067" y="412041"/>
+                </a:lnTo>
+                <a:lnTo>
+                  <a:pt x="11746" y="379576"/>
+                </a:lnTo>
+                <a:lnTo>
+                  <a:pt x="17561" y="347711"/>
+                </a:lnTo>
+                <a:lnTo>
+                  <a:pt x="24486" y="316573"/>
+                </a:lnTo>
+                <a:lnTo>
+                  <a:pt x="32494" y="286289"/>
+                </a:lnTo>
+                <a:lnTo>
+                  <a:pt x="41554" y="256981"/>
+                </a:lnTo>
+                <a:lnTo>
+                  <a:pt x="51628" y="228765"/>
+                </a:lnTo>
+                <a:lnTo>
+                  <a:pt x="62675" y="201757"/>
+                </a:lnTo>
+                <a:lnTo>
+                  <a:pt x="74653" y="176064"/>
+                </a:lnTo>
+                <a:lnTo>
+                  <a:pt x="87511" y="151790"/>
+                </a:lnTo>
+                <a:lnTo>
+                  <a:pt x="101199" y="129033"/>
+                </a:lnTo>
+                <a:lnTo>
+                  <a:pt x="115661" y="107884"/>
+                </a:lnTo>
+                <a:lnTo>
+                  <a:pt x="130839" y="88429"/>
+                </a:lnTo>
+                <a:lnTo>
+                  <a:pt x="146672" y="70746"/>
+                </a:lnTo>
+                <a:lnTo>
+                  <a:pt x="163097" y="54906"/>
+                </a:lnTo>
+                <a:lnTo>
+                  <a:pt x="180046" y="40973"/>
+                </a:lnTo>
+                <a:lnTo>
+                  <a:pt x="197452" y="29003"/>
+                </a:lnTo>
+                <a:lnTo>
+                  <a:pt x="215245" y="19045"/>
+                </a:lnTo>
+                <a:lnTo>
+                  <a:pt x="233353" y="11138"/>
+                </a:lnTo>
+                <a:lnTo>
+                  <a:pt x="251703" y="5313"/>
+                </a:lnTo>
+                <a:lnTo>
+                  <a:pt x="270221" y="1596"/>
+                </a:lnTo>
+                <a:lnTo>
+                  <a:pt x="288834" y="0"/>
+                </a:lnTo>
+                <a:lnTo>
+                  <a:pt x="307464" y="532"/>
+                </a:lnTo>
+                <a:lnTo>
+                  <a:pt x="326039" y="3190"/>
+                </a:lnTo>
+                <a:lnTo>
+                  <a:pt x="344483" y="7963"/>
+                </a:lnTo>
+                <a:lnTo>
+                  <a:pt x="362721" y="14833"/>
+                </a:lnTo>
+                <a:lnTo>
+                  <a:pt x="380680" y="23770"/>
+                </a:lnTo>
+                <a:lnTo>
+                  <a:pt x="398289" y="34740"/>
+                </a:lnTo>
+                <a:lnTo>
+                  <a:pt x="415475" y="47698"/>
+                </a:lnTo>
+                <a:lnTo>
+                  <a:pt x="432170" y="62592"/>
+                </a:lnTo>
+                <a:lnTo>
+                  <a:pt x="448307" y="79362"/>
+                </a:lnTo>
+                <a:lnTo>
+                  <a:pt x="463821" y="97940"/>
+                </a:lnTo>
+                <a:lnTo>
+                  <a:pt x="478648" y="118252"/>
+                </a:lnTo>
+                <a:lnTo>
+                  <a:pt x="492730" y="140216"/>
+                </a:lnTo>
+                <a:lnTo>
+                  <a:pt x="506010" y="163743"/>
+                </a:lnTo>
+                <a:lnTo>
+                  <a:pt x="518434" y="188739"/>
+                </a:lnTo>
+                <a:lnTo>
+                  <a:pt x="529953" y="215103"/>
+                </a:lnTo>
+                <a:lnTo>
+                  <a:pt x="540519" y="242729"/>
+                </a:lnTo>
+                <a:lnTo>
+                  <a:pt x="550090" y="271506"/>
+                </a:lnTo>
+                <a:lnTo>
+                  <a:pt x="558628" y="301317"/>
+                </a:lnTo>
+                <a:lnTo>
+                  <a:pt x="566099" y="332043"/>
+                </a:lnTo>
+                <a:lnTo>
+                  <a:pt x="572472" y="363560"/>
+                </a:lnTo>
+                <a:lnTo>
+                  <a:pt x="577721" y="395741"/>
+                </a:lnTo>
+                <a:lnTo>
+                  <a:pt x="581827" y="428457"/>
+                </a:lnTo>
+                <a:lnTo>
+                  <a:pt x="584771" y="461576"/>
+                </a:lnTo>
+                <a:lnTo>
+                  <a:pt x="586542" y="494964"/>
+                </a:lnTo>
+                <a:lnTo>
+                  <a:pt x="587133" y="528486"/>
+                </a:lnTo>
+              </a:path>
+            </a:pathLst>
+          </a:custGeom>
+          <a:noFill/>
+          <a:ln w="9144">
+            <a:solidFill>
+              <a:srgbClr val="8A2BE2"/>
+            </a:solidFill>
+          </a:ln>
+          <a:effectLst/>
+        </p:spPr>
+        <p:style>
+          <a:lnRef idx="1">
+            <a:schemeClr val="accent1"/>
+          </a:lnRef>
+          <a:fillRef idx="3">
+            <a:schemeClr val="accent1"/>
+          </a:fillRef>
+          <a:effectRef idx="2">
+            <a:schemeClr val="accent1"/>
+          </a:effectRef>
+          <a:fontRef idx="minor">
+            <a:schemeClr val="lt1"/>
+          </a:fontRef>
+        </p:style>
+        <p:txBody>
+          <a:bodyPr rtlCol="0" anchor="ctr"/>
+          <a:lstStyle/>
+          <a:p>
+            <a:pPr algn="ctr"/>
+            <a:endParaRPr/>
+          </a:p>
+        </p:txBody>
+      </p:sp>
+      <p:sp>
+        <p:nvSpPr>
+          <p:cNvPr id="5" name="Freeform 4"/>
+          <p:cNvSpPr/>
+          <p:nvPr/>
+        </p:nvSpPr>
+        <p:spPr>
+          <a:xfrm>
+            <a:off x="2589934" y="1949514"/>
+            <a:ext cx="280134" cy="48907"/>
+          </a:xfrm>
+          <a:custGeom>
+            <a:avLst/>
+            <a:gdLst/>
+            <a:ahLst/>
+            <a:cxnLst/>
+            <a:rect l="l" t="t" r="r" b="b"/>
+            <a:pathLst>
+              <a:path w="280134" h="48907">
+                <a:moveTo>
+                  <a:pt x="0" y="48907"/>
+                </a:moveTo>
+                <a:lnTo>
+                  <a:pt x="280134" y="0"/>
+                </a:lnTo>
+              </a:path>
+            </a:pathLst>
+          </a:custGeom>
+          <a:noFill/>
+          <a:ln w="9144">
+            <a:solidFill>
+              <a:srgbClr val="5F9EA0"/>
+            </a:solidFill>
+          </a:ln>
+          <a:effectLst/>
+        </p:spPr>
+        <p:style>
+          <a:lnRef idx="1">
+            <a:schemeClr val="accent1"/>
+          </a:lnRef>
+          <a:fillRef idx="3">
+            <a:schemeClr val="accent1"/>
+          </a:fillRef>
+          <a:effectRef idx="2">
+            <a:schemeClr val="accent1"/>
+          </a:effectRef>
+          <a:fontRef idx="minor">
+            <a:schemeClr val="lt1"/>
+          </a:fontRef>
+        </p:style>
+        <p:txBody>
+          <a:bodyPr rtlCol="0" anchor="ctr"/>
+          <a:lstStyle/>
+          <a:p>
+            <a:pPr algn="ctr"/>
+            <a:endParaRPr/>
+          </a:p>
+        </p:txBody>
+      </p:sp>
+      <p:sp>
+        <p:nvSpPr>
+          <p:cNvPr id="6" name="Freeform 5"/>
+          <p:cNvSpPr/>
+          <p:nvPr/>
+        </p:nvSpPr>
+        <p:spPr>
+          <a:xfrm>
+            <a:off x="2309799" y="1949514"/>
+            <a:ext cx="280135" cy="48907"/>
+          </a:xfrm>
+          <a:custGeom>
+            <a:avLst/>
+            <a:gdLst/>
+            <a:ahLst/>
+            <a:cxnLst/>
+            <a:rect l="l" t="t" r="r" b="b"/>
+            <a:pathLst>
+              <a:path w="280135" h="48907">
+                <a:moveTo>
+                  <a:pt x="280135" y="48907"/>
+                </a:moveTo>
+                <a:lnTo>
+                  <a:pt x="0" y="0"/>
+                </a:lnTo>
+              </a:path>
+            </a:pathLst>
+          </a:custGeom>
+          <a:noFill/>
+          <a:ln w="9144">
+            <a:solidFill>
+              <a:srgbClr val="5F9EA0"/>
+            </a:solidFill>
+          </a:ln>
+          <a:effectLst/>
+        </p:spPr>
+        <p:style>
+          <a:lnRef idx="1">
+            <a:schemeClr val="accent1"/>
+          </a:lnRef>
+          <a:fillRef idx="3">
+            <a:schemeClr val="accent1"/>
+          </a:fillRef>
+          <a:effectRef idx="2">
+            <a:schemeClr val="accent1"/>
+          </a:effectRef>
+          <a:fontRef idx="minor">
+            <a:schemeClr val="lt1"/>
+          </a:fontRef>
+        </p:style>
+        <p:txBody>
+          <a:bodyPr rtlCol="0" anchor="ctr"/>
+          <a:lstStyle/>
+          <a:p>
+            <a:pPr algn="ctr"/>
+            <a:endParaRPr/>
           </a:p>
         </p:txBody>
       </p:sp>

--- a/test/c_es_dn.pptx
+++ b/test/c_es_dn.pptx
@@ -5,7 +5,7 @@
     <p:sldMasterId id="2147483648" r:id="rId1"/>
   </p:sldMasterIdLst>
   <p:sldIdLst>
-    <p:sldId id="256" r:id="rId2"/>
+    <p:sldId id="256" r:id="rId7"/>
   </p:sldIdLst>
   <p:sldSz cx="9144000" cy="6858000" type="screen4x3"/>
   <p:notesSz cx="6858000" cy="9144000"/>
@@ -104,84 +104,7 @@
       </a:defRPr>
     </a:lvl9pPr>
   </p:defaultTextStyle>
-  <p:extLst>
-    <p:ext uri="{EFAFB233-063F-42B5-8137-9DF3F51BA10A}">
-      <p15:sldGuideLst xmlns:p15="http://schemas.microsoft.com/office/powerpoint/2012/main">
-        <p15:guide id="1" orient="horz" pos="2160">
-          <p15:clr>
-            <a:srgbClr val="A4A3A4"/>
-          </p15:clr>
-        </p15:guide>
-        <p15:guide id="2" pos="2880">
-          <p15:clr>
-            <a:srgbClr val="A4A3A4"/>
-          </p15:clr>
-        </p15:guide>
-      </p15:sldGuideLst>
-    </p:ext>
-  </p:extLst>
 </p:presentation>
-</file>
-
-<file path=ppt/changesInfos/changesInfo1.xml><?xml version="1.0" encoding="utf-8"?>
-<pc:chgInfo xmlns:a="http://schemas.openxmlformats.org/drawingml/2006/main" xmlns:r="http://schemas.openxmlformats.org/officeDocument/2006/relationships" xmlns:ac="http://schemas.microsoft.com/office/drawing/2013/main/command" xmlns:pc="http://schemas.microsoft.com/office/powerpoint/2013/main/command">
-  <pc:docChgLst>
-    <pc:chgData name="Uisang.Hwang" userId="ff31788d-e7f8-473d-8559-e09edcce660a" providerId="ADAL" clId="{4782C3F0-101A-4321-9814-D3528C60F802}"/>
-    <pc:docChg chg="undo custSel modSld">
-      <pc:chgData name="Uisang.Hwang" userId="ff31788d-e7f8-473d-8559-e09edcce660a" providerId="ADAL" clId="{4782C3F0-101A-4321-9814-D3528C60F802}" dt="2026-04-11T20:45:08.540" v="5" actId="1076"/>
-      <pc:docMkLst>
-        <pc:docMk/>
-      </pc:docMkLst>
-      <pc:sldChg chg="modSp mod">
-        <pc:chgData name="Uisang.Hwang" userId="ff31788d-e7f8-473d-8559-e09edcce660a" providerId="ADAL" clId="{4782C3F0-101A-4321-9814-D3528C60F802}" dt="2026-04-11T20:45:08.540" v="5" actId="1076"/>
-        <pc:sldMkLst>
-          <pc:docMk/>
-          <pc:sldMk cId="0" sldId="256"/>
-        </pc:sldMkLst>
-        <pc:spChg chg="mod">
-          <ac:chgData name="Uisang.Hwang" userId="ff31788d-e7f8-473d-8559-e09edcce660a" providerId="ADAL" clId="{4782C3F0-101A-4321-9814-D3528C60F802}" dt="2026-04-11T20:44:47.011" v="2" actId="1076"/>
-          <ac:spMkLst>
-            <pc:docMk/>
-            <pc:sldMk cId="0" sldId="256"/>
-            <ac:spMk id="2" creationId="{00000000-0000-0000-0000-000000000000}"/>
-          </ac:spMkLst>
-        </pc:spChg>
-        <pc:spChg chg="mod">
-          <ac:chgData name="Uisang.Hwang" userId="ff31788d-e7f8-473d-8559-e09edcce660a" providerId="ADAL" clId="{4782C3F0-101A-4321-9814-D3528C60F802}" dt="2026-04-11T20:44:47.011" v="2" actId="1076"/>
-          <ac:spMkLst>
-            <pc:docMk/>
-            <pc:sldMk cId="0" sldId="256"/>
-            <ac:spMk id="3" creationId="{00000000-0000-0000-0000-000000000000}"/>
-          </ac:spMkLst>
-        </pc:spChg>
-        <pc:spChg chg="mod">
-          <ac:chgData name="Uisang.Hwang" userId="ff31788d-e7f8-473d-8559-e09edcce660a" providerId="ADAL" clId="{4782C3F0-101A-4321-9814-D3528C60F802}" dt="2026-04-11T20:45:08.540" v="5" actId="1076"/>
-          <ac:spMkLst>
-            <pc:docMk/>
-            <pc:sldMk cId="0" sldId="256"/>
-            <ac:spMk id="4" creationId="{00000000-0000-0000-0000-000000000000}"/>
-          </ac:spMkLst>
-        </pc:spChg>
-        <pc:spChg chg="mod">
-          <ac:chgData name="Uisang.Hwang" userId="ff31788d-e7f8-473d-8559-e09edcce660a" providerId="ADAL" clId="{4782C3F0-101A-4321-9814-D3528C60F802}" dt="2026-04-11T20:44:47.011" v="2" actId="1076"/>
-          <ac:spMkLst>
-            <pc:docMk/>
-            <pc:sldMk cId="0" sldId="256"/>
-            <ac:spMk id="5" creationId="{00000000-0000-0000-0000-000000000000}"/>
-          </ac:spMkLst>
-        </pc:spChg>
-        <pc:spChg chg="mod">
-          <ac:chgData name="Uisang.Hwang" userId="ff31788d-e7f8-473d-8559-e09edcce660a" providerId="ADAL" clId="{4782C3F0-101A-4321-9814-D3528C60F802}" dt="2026-04-11T20:44:47.011" v="2" actId="1076"/>
-          <ac:spMkLst>
-            <pc:docMk/>
-            <pc:sldMk cId="0" sldId="256"/>
-            <ac:spMk id="6" creationId="{00000000-0000-0000-0000-000000000000}"/>
-          </ac:spMkLst>
-        </pc:spChg>
-      </pc:sldChg>
-    </pc:docChg>
-  </pc:docChgLst>
-</pc:chgInfo>
 </file>
 
 <file path=ppt/slideLayouts/slideLayout1.xml><?xml version="1.0" encoding="utf-8"?>
@@ -222,9 +145,10 @@
           <a:lstStyle/>
           <a:p>
             <a:r>
-              <a:rPr lang="en-US"/>
+              <a:rPr lang="en-US" smtClean="0"/>
               <a:t>Click to edit Master title style</a:t>
             </a:r>
+            <a:endParaRPr lang="en-US"/>
           </a:p>
         </p:txBody>
       </p:sp>
@@ -340,9 +264,10 @@
           </a:lstStyle>
           <a:p>
             <a:r>
-              <a:rPr lang="en-US"/>
+              <a:rPr lang="en-US" smtClean="0"/>
               <a:t>Click to edit Master subtitle style</a:t>
             </a:r>
+            <a:endParaRPr lang="en-US"/>
           </a:p>
         </p:txBody>
       </p:sp>
@@ -363,7 +288,7 @@
           <a:p>
             <a:fld id="{5BCAD085-E8A6-8845-BD4E-CB4CCA059FC4}" type="datetimeFigureOut">
               <a:rPr lang="en-US" smtClean="0"/>
-              <a:t>4/11/2026(Sat)</a:t>
+              <a:t>1/27/13</a:t>
             </a:fld>
             <a:endParaRPr lang="en-US"/>
           </a:p>
@@ -457,9 +382,10 @@
           <a:lstStyle/>
           <a:p>
             <a:r>
-              <a:rPr lang="en-US"/>
+              <a:rPr lang="en-US" smtClean="0"/>
               <a:t>Click to edit Master title style</a:t>
             </a:r>
+            <a:endParaRPr lang="en-US"/>
           </a:p>
         </p:txBody>
       </p:sp>
@@ -480,37 +406,38 @@
           <a:p>
             <a:pPr lvl="0"/>
             <a:r>
-              <a:rPr lang="en-US"/>
+              <a:rPr lang="en-US" smtClean="0"/>
               <a:t>Click to edit Master text styles</a:t>
             </a:r>
           </a:p>
           <a:p>
             <a:pPr lvl="1"/>
             <a:r>
-              <a:rPr lang="en-US"/>
+              <a:rPr lang="en-US" smtClean="0"/>
               <a:t>Second level</a:t>
             </a:r>
           </a:p>
           <a:p>
             <a:pPr lvl="2"/>
             <a:r>
-              <a:rPr lang="en-US"/>
+              <a:rPr lang="en-US" smtClean="0"/>
               <a:t>Third level</a:t>
             </a:r>
           </a:p>
           <a:p>
             <a:pPr lvl="3"/>
             <a:r>
-              <a:rPr lang="en-US"/>
+              <a:rPr lang="en-US" smtClean="0"/>
               <a:t>Fourth level</a:t>
             </a:r>
           </a:p>
           <a:p>
             <a:pPr lvl="4"/>
             <a:r>
-              <a:rPr lang="en-US"/>
+              <a:rPr lang="en-US" smtClean="0"/>
               <a:t>Fifth level</a:t>
             </a:r>
+            <a:endParaRPr lang="en-US"/>
           </a:p>
         </p:txBody>
       </p:sp>
@@ -531,7 +458,7 @@
           <a:p>
             <a:fld id="{5BCAD085-E8A6-8845-BD4E-CB4CCA059FC4}" type="datetimeFigureOut">
               <a:rPr lang="en-US" smtClean="0"/>
-              <a:t>4/11/2026(Sat)</a:t>
+              <a:t>1/27/13</a:t>
             </a:fld>
             <a:endParaRPr lang="en-US"/>
           </a:p>
@@ -630,9 +557,10 @@
           <a:lstStyle/>
           <a:p>
             <a:r>
-              <a:rPr lang="en-US"/>
+              <a:rPr lang="en-US" smtClean="0"/>
               <a:t>Click to edit Master title style</a:t>
             </a:r>
+            <a:endParaRPr lang="en-US"/>
           </a:p>
         </p:txBody>
       </p:sp>
@@ -658,37 +586,38 @@
           <a:p>
             <a:pPr lvl="0"/>
             <a:r>
-              <a:rPr lang="en-US"/>
+              <a:rPr lang="en-US" smtClean="0"/>
               <a:t>Click to edit Master text styles</a:t>
             </a:r>
           </a:p>
           <a:p>
             <a:pPr lvl="1"/>
             <a:r>
-              <a:rPr lang="en-US"/>
+              <a:rPr lang="en-US" smtClean="0"/>
               <a:t>Second level</a:t>
             </a:r>
           </a:p>
           <a:p>
             <a:pPr lvl="2"/>
             <a:r>
-              <a:rPr lang="en-US"/>
+              <a:rPr lang="en-US" smtClean="0"/>
               <a:t>Third level</a:t>
             </a:r>
           </a:p>
           <a:p>
             <a:pPr lvl="3"/>
             <a:r>
-              <a:rPr lang="en-US"/>
+              <a:rPr lang="en-US" smtClean="0"/>
               <a:t>Fourth level</a:t>
             </a:r>
           </a:p>
           <a:p>
             <a:pPr lvl="4"/>
             <a:r>
-              <a:rPr lang="en-US"/>
+              <a:rPr lang="en-US" smtClean="0"/>
               <a:t>Fifth level</a:t>
             </a:r>
+            <a:endParaRPr lang="en-US"/>
           </a:p>
         </p:txBody>
       </p:sp>
@@ -709,7 +638,7 @@
           <a:p>
             <a:fld id="{5BCAD085-E8A6-8845-BD4E-CB4CCA059FC4}" type="datetimeFigureOut">
               <a:rPr lang="en-US" smtClean="0"/>
-              <a:t>4/11/2026(Sat)</a:t>
+              <a:t>1/27/13</a:t>
             </a:fld>
             <a:endParaRPr lang="en-US"/>
           </a:p>
@@ -803,9 +732,10 @@
           <a:lstStyle/>
           <a:p>
             <a:r>
-              <a:rPr lang="en-US"/>
+              <a:rPr lang="en-US" smtClean="0"/>
               <a:t>Click to edit Master title style</a:t>
             </a:r>
+            <a:endParaRPr lang="en-US"/>
           </a:p>
         </p:txBody>
       </p:sp>
@@ -826,37 +756,38 @@
           <a:p>
             <a:pPr lvl="0"/>
             <a:r>
-              <a:rPr lang="en-US"/>
+              <a:rPr lang="en-US" smtClean="0"/>
               <a:t>Click to edit Master text styles</a:t>
             </a:r>
           </a:p>
           <a:p>
             <a:pPr lvl="1"/>
             <a:r>
-              <a:rPr lang="en-US"/>
+              <a:rPr lang="en-US" smtClean="0"/>
               <a:t>Second level</a:t>
             </a:r>
           </a:p>
           <a:p>
             <a:pPr lvl="2"/>
             <a:r>
-              <a:rPr lang="en-US"/>
+              <a:rPr lang="en-US" smtClean="0"/>
               <a:t>Third level</a:t>
             </a:r>
           </a:p>
           <a:p>
             <a:pPr lvl="3"/>
             <a:r>
-              <a:rPr lang="en-US"/>
+              <a:rPr lang="en-US" smtClean="0"/>
               <a:t>Fourth level</a:t>
             </a:r>
           </a:p>
           <a:p>
             <a:pPr lvl="4"/>
             <a:r>
-              <a:rPr lang="en-US"/>
+              <a:rPr lang="en-US" smtClean="0"/>
               <a:t>Fifth level</a:t>
             </a:r>
+            <a:endParaRPr lang="en-US"/>
           </a:p>
         </p:txBody>
       </p:sp>
@@ -877,7 +808,7 @@
           <a:p>
             <a:fld id="{5BCAD085-E8A6-8845-BD4E-CB4CCA059FC4}" type="datetimeFigureOut">
               <a:rPr lang="en-US" smtClean="0"/>
-              <a:t>4/11/2026(Sat)</a:t>
+              <a:t>1/27/13</a:t>
             </a:fld>
             <a:endParaRPr lang="en-US"/>
           </a:p>
@@ -980,9 +911,10 @@
           </a:lstStyle>
           <a:p>
             <a:r>
-              <a:rPr lang="en-US"/>
+              <a:rPr lang="en-US" smtClean="0"/>
               <a:t>Click to edit Master title style</a:t>
             </a:r>
+            <a:endParaRPr lang="en-US"/>
           </a:p>
         </p:txBody>
       </p:sp>
@@ -1099,7 +1031,7 @@
           <a:p>
             <a:pPr lvl="0"/>
             <a:r>
-              <a:rPr lang="en-US"/>
+              <a:rPr lang="en-US" smtClean="0"/>
               <a:t>Click to edit Master text styles</a:t>
             </a:r>
           </a:p>
@@ -1122,7 +1054,7 @@
           <a:p>
             <a:fld id="{5BCAD085-E8A6-8845-BD4E-CB4CCA059FC4}" type="datetimeFigureOut">
               <a:rPr lang="en-US" smtClean="0"/>
-              <a:t>4/11/2026(Sat)</a:t>
+              <a:t>1/27/13</a:t>
             </a:fld>
             <a:endParaRPr lang="en-US"/>
           </a:p>
@@ -1216,9 +1148,10 @@
           <a:lstStyle/>
           <a:p>
             <a:r>
-              <a:rPr lang="en-US"/>
+              <a:rPr lang="en-US" smtClean="0"/>
               <a:t>Click to edit Master title style</a:t>
             </a:r>
+            <a:endParaRPr lang="en-US"/>
           </a:p>
         </p:txBody>
       </p:sp>
@@ -1272,37 +1205,38 @@
           <a:p>
             <a:pPr lvl="0"/>
             <a:r>
-              <a:rPr lang="en-US"/>
+              <a:rPr lang="en-US" smtClean="0"/>
               <a:t>Click to edit Master text styles</a:t>
             </a:r>
           </a:p>
           <a:p>
             <a:pPr lvl="1"/>
             <a:r>
-              <a:rPr lang="en-US"/>
+              <a:rPr lang="en-US" smtClean="0"/>
               <a:t>Second level</a:t>
             </a:r>
           </a:p>
           <a:p>
             <a:pPr lvl="2"/>
             <a:r>
-              <a:rPr lang="en-US"/>
+              <a:rPr lang="en-US" smtClean="0"/>
               <a:t>Third level</a:t>
             </a:r>
           </a:p>
           <a:p>
             <a:pPr lvl="3"/>
             <a:r>
-              <a:rPr lang="en-US"/>
+              <a:rPr lang="en-US" smtClean="0"/>
               <a:t>Fourth level</a:t>
             </a:r>
           </a:p>
           <a:p>
             <a:pPr lvl="4"/>
             <a:r>
-              <a:rPr lang="en-US"/>
+              <a:rPr lang="en-US" smtClean="0"/>
               <a:t>Fifth level</a:t>
             </a:r>
+            <a:endParaRPr lang="en-US"/>
           </a:p>
         </p:txBody>
       </p:sp>
@@ -1356,37 +1290,38 @@
           <a:p>
             <a:pPr lvl="0"/>
             <a:r>
-              <a:rPr lang="en-US"/>
+              <a:rPr lang="en-US" smtClean="0"/>
               <a:t>Click to edit Master text styles</a:t>
             </a:r>
           </a:p>
           <a:p>
             <a:pPr lvl="1"/>
             <a:r>
-              <a:rPr lang="en-US"/>
+              <a:rPr lang="en-US" smtClean="0"/>
               <a:t>Second level</a:t>
             </a:r>
           </a:p>
           <a:p>
             <a:pPr lvl="2"/>
             <a:r>
-              <a:rPr lang="en-US"/>
+              <a:rPr lang="en-US" smtClean="0"/>
               <a:t>Third level</a:t>
             </a:r>
           </a:p>
           <a:p>
             <a:pPr lvl="3"/>
             <a:r>
-              <a:rPr lang="en-US"/>
+              <a:rPr lang="en-US" smtClean="0"/>
               <a:t>Fourth level</a:t>
             </a:r>
           </a:p>
           <a:p>
             <a:pPr lvl="4"/>
             <a:r>
-              <a:rPr lang="en-US"/>
+              <a:rPr lang="en-US" smtClean="0"/>
               <a:t>Fifth level</a:t>
             </a:r>
+            <a:endParaRPr lang="en-US"/>
           </a:p>
         </p:txBody>
       </p:sp>
@@ -1407,7 +1342,7 @@
           <a:p>
             <a:fld id="{5BCAD085-E8A6-8845-BD4E-CB4CCA059FC4}" type="datetimeFigureOut">
               <a:rPr lang="en-US" smtClean="0"/>
-              <a:t>4/11/2026(Sat)</a:t>
+              <a:t>1/27/13</a:t>
             </a:fld>
             <a:endParaRPr lang="en-US"/>
           </a:p>
@@ -1505,9 +1440,10 @@
           </a:lstStyle>
           <a:p>
             <a:r>
-              <a:rPr lang="en-US"/>
+              <a:rPr lang="en-US" smtClean="0"/>
               <a:t>Click to edit Master title style</a:t>
             </a:r>
+            <a:endParaRPr lang="en-US"/>
           </a:p>
         </p:txBody>
       </p:sp>
@@ -1570,7 +1506,7 @@
           <a:p>
             <a:pPr lvl="0"/>
             <a:r>
-              <a:rPr lang="en-US"/>
+              <a:rPr lang="en-US" smtClean="0"/>
               <a:t>Click to edit Master text styles</a:t>
             </a:r>
           </a:p>
@@ -1626,37 +1562,38 @@
           <a:p>
             <a:pPr lvl="0"/>
             <a:r>
-              <a:rPr lang="en-US"/>
+              <a:rPr lang="en-US" smtClean="0"/>
               <a:t>Click to edit Master text styles</a:t>
             </a:r>
           </a:p>
           <a:p>
             <a:pPr lvl="1"/>
             <a:r>
-              <a:rPr lang="en-US"/>
+              <a:rPr lang="en-US" smtClean="0"/>
               <a:t>Second level</a:t>
             </a:r>
           </a:p>
           <a:p>
             <a:pPr lvl="2"/>
             <a:r>
-              <a:rPr lang="en-US"/>
+              <a:rPr lang="en-US" smtClean="0"/>
               <a:t>Third level</a:t>
             </a:r>
           </a:p>
           <a:p>
             <a:pPr lvl="3"/>
             <a:r>
-              <a:rPr lang="en-US"/>
+              <a:rPr lang="en-US" smtClean="0"/>
               <a:t>Fourth level</a:t>
             </a:r>
           </a:p>
           <a:p>
             <a:pPr lvl="4"/>
             <a:r>
-              <a:rPr lang="en-US"/>
+              <a:rPr lang="en-US" smtClean="0"/>
               <a:t>Fifth level</a:t>
             </a:r>
+            <a:endParaRPr lang="en-US"/>
           </a:p>
         </p:txBody>
       </p:sp>
@@ -1719,7 +1656,7 @@
           <a:p>
             <a:pPr lvl="0"/>
             <a:r>
-              <a:rPr lang="en-US"/>
+              <a:rPr lang="en-US" smtClean="0"/>
               <a:t>Click to edit Master text styles</a:t>
             </a:r>
           </a:p>
@@ -1775,37 +1712,38 @@
           <a:p>
             <a:pPr lvl="0"/>
             <a:r>
-              <a:rPr lang="en-US"/>
+              <a:rPr lang="en-US" smtClean="0"/>
               <a:t>Click to edit Master text styles</a:t>
             </a:r>
           </a:p>
           <a:p>
             <a:pPr lvl="1"/>
             <a:r>
-              <a:rPr lang="en-US"/>
+              <a:rPr lang="en-US" smtClean="0"/>
               <a:t>Second level</a:t>
             </a:r>
           </a:p>
           <a:p>
             <a:pPr lvl="2"/>
             <a:r>
-              <a:rPr lang="en-US"/>
+              <a:rPr lang="en-US" smtClean="0"/>
               <a:t>Third level</a:t>
             </a:r>
           </a:p>
           <a:p>
             <a:pPr lvl="3"/>
             <a:r>
-              <a:rPr lang="en-US"/>
+              <a:rPr lang="en-US" smtClean="0"/>
               <a:t>Fourth level</a:t>
             </a:r>
           </a:p>
           <a:p>
             <a:pPr lvl="4"/>
             <a:r>
-              <a:rPr lang="en-US"/>
+              <a:rPr lang="en-US" smtClean="0"/>
               <a:t>Fifth level</a:t>
             </a:r>
+            <a:endParaRPr lang="en-US"/>
           </a:p>
         </p:txBody>
       </p:sp>
@@ -1826,7 +1764,7 @@
           <a:p>
             <a:fld id="{5BCAD085-E8A6-8845-BD4E-CB4CCA059FC4}" type="datetimeFigureOut">
               <a:rPr lang="en-US" smtClean="0"/>
-              <a:t>4/11/2026(Sat)</a:t>
+              <a:t>1/27/13</a:t>
             </a:fld>
             <a:endParaRPr lang="en-US"/>
           </a:p>
@@ -1920,9 +1858,10 @@
           <a:lstStyle/>
           <a:p>
             <a:r>
-              <a:rPr lang="en-US"/>
+              <a:rPr lang="en-US" smtClean="0"/>
               <a:t>Click to edit Master title style</a:t>
             </a:r>
+            <a:endParaRPr lang="en-US"/>
           </a:p>
         </p:txBody>
       </p:sp>
@@ -1943,7 +1882,7 @@
           <a:p>
             <a:fld id="{5BCAD085-E8A6-8845-BD4E-CB4CCA059FC4}" type="datetimeFigureOut">
               <a:rPr lang="en-US" smtClean="0"/>
-              <a:t>4/11/2026(Sat)</a:t>
+              <a:t>1/27/13</a:t>
             </a:fld>
             <a:endParaRPr lang="en-US"/>
           </a:p>
@@ -2038,7 +1977,7 @@
           <a:p>
             <a:fld id="{5BCAD085-E8A6-8845-BD4E-CB4CCA059FC4}" type="datetimeFigureOut">
               <a:rPr lang="en-US" smtClean="0"/>
-              <a:t>4/11/2026(Sat)</a:t>
+              <a:t>1/27/13</a:t>
             </a:fld>
             <a:endParaRPr lang="en-US"/>
           </a:p>
@@ -2141,9 +2080,10 @@
           </a:lstStyle>
           <a:p>
             <a:r>
-              <a:rPr lang="en-US"/>
+              <a:rPr lang="en-US" smtClean="0"/>
               <a:t>Click to edit Master title style</a:t>
             </a:r>
+            <a:endParaRPr lang="en-US"/>
           </a:p>
         </p:txBody>
       </p:sp>
@@ -2197,37 +2137,38 @@
           <a:p>
             <a:pPr lvl="0"/>
             <a:r>
-              <a:rPr lang="en-US"/>
+              <a:rPr lang="en-US" smtClean="0"/>
               <a:t>Click to edit Master text styles</a:t>
             </a:r>
           </a:p>
           <a:p>
             <a:pPr lvl="1"/>
             <a:r>
-              <a:rPr lang="en-US"/>
+              <a:rPr lang="en-US" smtClean="0"/>
               <a:t>Second level</a:t>
             </a:r>
           </a:p>
           <a:p>
             <a:pPr lvl="2"/>
             <a:r>
-              <a:rPr lang="en-US"/>
+              <a:rPr lang="en-US" smtClean="0"/>
               <a:t>Third level</a:t>
             </a:r>
           </a:p>
           <a:p>
             <a:pPr lvl="3"/>
             <a:r>
-              <a:rPr lang="en-US"/>
+              <a:rPr lang="en-US" smtClean="0"/>
               <a:t>Fourth level</a:t>
             </a:r>
           </a:p>
           <a:p>
             <a:pPr lvl="4"/>
             <a:r>
-              <a:rPr lang="en-US"/>
+              <a:rPr lang="en-US" smtClean="0"/>
               <a:t>Fifth level</a:t>
             </a:r>
+            <a:endParaRPr lang="en-US"/>
           </a:p>
         </p:txBody>
       </p:sp>
@@ -2290,7 +2231,7 @@
           <a:p>
             <a:pPr lvl="0"/>
             <a:r>
-              <a:rPr lang="en-US"/>
+              <a:rPr lang="en-US" smtClean="0"/>
               <a:t>Click to edit Master text styles</a:t>
             </a:r>
           </a:p>
@@ -2313,7 +2254,7 @@
           <a:p>
             <a:fld id="{5BCAD085-E8A6-8845-BD4E-CB4CCA059FC4}" type="datetimeFigureOut">
               <a:rPr lang="en-US" smtClean="0"/>
-              <a:t>4/11/2026(Sat)</a:t>
+              <a:t>1/27/13</a:t>
             </a:fld>
             <a:endParaRPr lang="en-US"/>
           </a:p>
@@ -2416,9 +2357,10 @@
           </a:lstStyle>
           <a:p>
             <a:r>
-              <a:rPr lang="en-US"/>
+              <a:rPr lang="en-US" smtClean="0"/>
               <a:t>Click to edit Master title style</a:t>
             </a:r>
+            <a:endParaRPr lang="en-US"/>
           </a:p>
         </p:txBody>
       </p:sp>
@@ -2542,7 +2484,7 @@
           <a:p>
             <a:pPr lvl="0"/>
             <a:r>
-              <a:rPr lang="en-US"/>
+              <a:rPr lang="en-US" smtClean="0"/>
               <a:t>Click to edit Master text styles</a:t>
             </a:r>
           </a:p>
@@ -2565,7 +2507,7 @@
           <a:p>
             <a:fld id="{5BCAD085-E8A6-8845-BD4E-CB4CCA059FC4}" type="datetimeFigureOut">
               <a:rPr lang="en-US" smtClean="0"/>
-              <a:t>4/11/2026(Sat)</a:t>
+              <a:t>1/27/13</a:t>
             </a:fld>
             <a:endParaRPr lang="en-US"/>
           </a:p>
@@ -2674,9 +2616,10 @@
           <a:lstStyle/>
           <a:p>
             <a:r>
-              <a:rPr lang="en-US"/>
+              <a:rPr lang="en-US" smtClean="0"/>
               <a:t>Click to edit Master title style</a:t>
             </a:r>
+            <a:endParaRPr lang="en-US"/>
           </a:p>
         </p:txBody>
       </p:sp>
@@ -2707,37 +2650,38 @@
           <a:p>
             <a:pPr lvl="0"/>
             <a:r>
-              <a:rPr lang="en-US"/>
+              <a:rPr lang="en-US" smtClean="0"/>
               <a:t>Click to edit Master text styles</a:t>
             </a:r>
           </a:p>
           <a:p>
             <a:pPr lvl="1"/>
             <a:r>
-              <a:rPr lang="en-US"/>
+              <a:rPr lang="en-US" smtClean="0"/>
               <a:t>Second level</a:t>
             </a:r>
           </a:p>
           <a:p>
             <a:pPr lvl="2"/>
             <a:r>
-              <a:rPr lang="en-US"/>
+              <a:rPr lang="en-US" smtClean="0"/>
               <a:t>Third level</a:t>
             </a:r>
           </a:p>
           <a:p>
             <a:pPr lvl="3"/>
             <a:r>
-              <a:rPr lang="en-US"/>
+              <a:rPr lang="en-US" smtClean="0"/>
               <a:t>Fourth level</a:t>
             </a:r>
           </a:p>
           <a:p>
             <a:pPr lvl="4"/>
             <a:r>
-              <a:rPr lang="en-US"/>
+              <a:rPr lang="en-US" smtClean="0"/>
               <a:t>Fifth level</a:t>
             </a:r>
+            <a:endParaRPr lang="en-US"/>
           </a:p>
         </p:txBody>
       </p:sp>
@@ -2776,7 +2720,7 @@
           <a:p>
             <a:fld id="{5BCAD085-E8A6-8845-BD4E-CB4CCA059FC4}" type="datetimeFigureOut">
               <a:rPr lang="en-US" smtClean="0"/>
-              <a:t>4/11/2026(Sat)</a:t>
+              <a:t>1/27/13</a:t>
             </a:fld>
             <a:endParaRPr lang="en-US"/>
           </a:p>
@@ -3135,7 +3079,7 @@
 </file>
 
 <file path=ppt/slides/slide1.xml><?xml version="1.0" encoding="utf-8"?>
-<p:sld xmlns:a="http://schemas.openxmlformats.org/drawingml/2006/main" xmlns:r="http://schemas.openxmlformats.org/officeDocument/2006/relationships" xmlns:p="http://schemas.openxmlformats.org/presentationml/2006/main">
+<p:sld xmlns:a="http://schemas.openxmlformats.org/drawingml/2006/main" xmlns:p="http://schemas.openxmlformats.org/presentationml/2006/main" xmlns:r="http://schemas.openxmlformats.org/officeDocument/2006/relationships">
   <p:cSld>
     <p:spTree>
       <p:nvGrpSpPr>
@@ -3143,14 +3087,7 @@
         <p:cNvGrpSpPr/>
         <p:nvPr/>
       </p:nvGrpSpPr>
-      <p:grpSpPr>
-        <a:xfrm>
-          <a:off x="0" y="0"/>
-          <a:ext cx="0" cy="0"/>
-          <a:chOff x="0" y="0"/>
-          <a:chExt cx="0" cy="0"/>
-        </a:xfrm>
-      </p:grpSpPr>
+      <p:grpSpPr/>
       <p:sp>
         <p:nvSpPr>
           <p:cNvPr id="2" name="Freeform 1"/>
@@ -3159,7 +3096,7 @@
         </p:nvSpPr>
         <p:spPr>
           <a:xfrm>
-            <a:off x="1018309" y="1579418"/>
+            <a:off x="0" y="0"/>
             <a:ext cx="6858000" cy="2902988"/>
           </a:xfrm>
           <a:custGeom>
@@ -4224,7 +4161,7 @@
             </a:pathLst>
           </a:custGeom>
           <a:noFill/>
-          <a:ln w="4572">
+          <a:ln w="9144">
             <a:solidFill>
               <a:srgbClr val="0000FF"/>
             </a:solidFill>
@@ -4250,7 +4187,6 @@
           <a:lstStyle/>
           <a:p>
             <a:pPr algn="ctr"/>
-            <a:endParaRPr/>
           </a:p>
         </p:txBody>
       </p:sp>
@@ -4262,7 +4198,7 @@
         </p:nvSpPr>
         <p:spPr>
           <a:xfrm>
-            <a:off x="2305705" y="1714086"/>
+            <a:off x="1287396" y="134668"/>
             <a:ext cx="568600" cy="568671"/>
           </a:xfrm>
           <a:custGeom>
@@ -4603,7 +4539,6 @@
           <a:lstStyle/>
           <a:p>
             <a:pPr algn="ctr"/>
-            <a:endParaRPr/>
           </a:p>
         </p:txBody>
       </p:sp>
@@ -4615,7 +4550,7 @@
         </p:nvSpPr>
         <p:spPr>
           <a:xfrm>
-            <a:off x="3534617" y="1584075"/>
+            <a:off x="1278132" y="66"/>
             <a:ext cx="587133" cy="1056973"/>
           </a:xfrm>
           <a:custGeom>
@@ -4956,7 +4891,6 @@
           <a:lstStyle/>
           <a:p>
             <a:pPr algn="ctr"/>
-            <a:endParaRPr/>
           </a:p>
         </p:txBody>
       </p:sp>
@@ -4968,7 +4902,7 @@
         </p:nvSpPr>
         <p:spPr>
           <a:xfrm>
-            <a:off x="2589934" y="1949514"/>
+            <a:off x="1571625" y="370096"/>
             <a:ext cx="280134" cy="48907"/>
           </a:xfrm>
           <a:custGeom>
@@ -5015,7 +4949,6 @@
           <a:lstStyle/>
           <a:p>
             <a:pPr algn="ctr"/>
-            <a:endParaRPr/>
           </a:p>
         </p:txBody>
       </p:sp>
@@ -5027,7 +4960,7 @@
         </p:nvSpPr>
         <p:spPr>
           <a:xfrm>
-            <a:off x="2309799" y="1949514"/>
+            <a:off x="1291490" y="370096"/>
             <a:ext cx="280135" cy="48907"/>
           </a:xfrm>
           <a:custGeom>
@@ -5074,7 +5007,6 @@
           <a:lstStyle/>
           <a:p>
             <a:pPr algn="ctr"/>
-            <a:endParaRPr/>
           </a:p>
         </p:txBody>
       </p:sp>
